--- a/public/fun/pack/pptx/review/보장점검양식_32_부부점검_도서관창가.pptx
+++ b/public/fun/pack/pptx/review/보장점검양식_32_부부점검_도서관창가.pptx
@@ -3286,6 +3286,14 @@
 <file path=ppt/slides/slide1.xml><?xml version="1.0" encoding="utf-8"?>
 <p:sld xmlns:a="http://schemas.openxmlformats.org/drawingml/2006/main" xmlns:p="http://schemas.openxmlformats.org/presentationml/2006/main" xmlns:r="http://schemas.openxmlformats.org/officeDocument/2006/relationships">
   <p:cSld>
+    <p:bg>
+      <p:bgPr>
+        <a:solidFill>
+          <a:srgbClr val="493527"/>
+        </a:solidFill>
+        <a:effectLst/>
+      </p:bgPr>
+    </p:bg>
     <p:spTree>
       <p:nvGrpSpPr>
         <p:cNvPr id="1" name=""/>
@@ -3293,30 +3301,102 @@
         <p:nvPr/>
       </p:nvGrpSpPr>
       <p:grpSpPr/>
-      <p:pic>
-        <p:nvPicPr>
-          <p:cNvPr id="3" name="표지 그림" descr="review-32.jpg"/>
-          <p:cNvPicPr>
-            <a:picLocks noChangeAspect="1"/>
-          </p:cNvPicPr>
+      <p:sp>
+        <p:nvSpPr>
+          <p:cNvPr id="3" name="장식"/>
+          <p:cNvSpPr/>
           <p:nvPr/>
-        </p:nvPicPr>
-        <p:blipFill>
-          <a:blip r:embed="rId2"/>
-          <a:stretch>
-            <a:fillRect/>
-          </a:stretch>
-        </p:blipFill>
-        <p:spPr>
-          <a:xfrm>
-            <a:off x="0" y="0"/>
-            <a:ext cx="12191695" cy="6858000"/>
+        </p:nvSpPr>
+        <p:spPr>
+          <a:xfrm>
+            <a:off x="6339681" y="137159"/>
+            <a:ext cx="6583680" cy="6583680"/>
+          </a:xfrm>
+          <a:prstGeom prst="ellipse">
+            <a:avLst/>
+          </a:prstGeom>
+          <a:solidFill>
+            <a:srgbClr val="A67A5C"/>
+          </a:solidFill>
+          <a:ln>
+            <a:noFill/>
+          </a:ln>
+        </p:spPr>
+        <p:txBody>
+          <a:bodyPr rtlCol="0" anchor="ctr"/>
+          <a:lstStyle/>
+          <a:p>
+            <a:pPr algn="ctr"/>
+          </a:p>
+        </p:txBody>
+      </p:sp>
+      <p:sp>
+        <p:nvSpPr>
+          <p:cNvPr id="4" name="장식"/>
+          <p:cNvSpPr/>
+          <p:nvPr/>
+        </p:nvSpPr>
+        <p:spPr>
+          <a:xfrm>
+            <a:off x="7315017" y="1325880"/>
+            <a:ext cx="4206240" cy="4206240"/>
+          </a:xfrm>
+          <a:prstGeom prst="ellipse">
+            <a:avLst/>
+          </a:prstGeom>
+          <a:solidFill>
+            <a:srgbClr val="D89F79"/>
+          </a:solidFill>
+          <a:ln>
+            <a:noFill/>
+          </a:ln>
+        </p:spPr>
+        <p:txBody>
+          <a:bodyPr rtlCol="0" anchor="ctr"/>
+          <a:lstStyle/>
+          <a:p>
+            <a:pPr algn="ctr"/>
+          </a:p>
+        </p:txBody>
+      </p:sp>
+      <p:sp>
+        <p:nvSpPr>
+          <p:cNvPr id="5" name="라벨"/>
+          <p:cNvSpPr txBox="1"/>
+          <p:nvPr/>
+        </p:nvSpPr>
+        <p:spPr>
+          <a:xfrm>
+            <a:off x="822960" y="2148840"/>
+            <a:ext cx="5608179" cy="274320"/>
           </a:xfrm>
           <a:prstGeom prst="rect">
             <a:avLst/>
           </a:prstGeom>
-        </p:spPr>
-      </p:pic>
+          <a:noFill/>
+        </p:spPr>
+        <p:txBody>
+          <a:bodyPr wrap="square" lIns="54864" rIns="54864" tIns="27432" bIns="27432" anchor="t">
+            <a:noAutofit/>
+          </a:bodyPr>
+          <a:lstStyle/>
+          <a:p>
+            <a:pPr algn="l">
+              <a:lnSpc>
+                <a:spcPct val="115000"/>
+              </a:lnSpc>
+            </a:pPr>
+            <a:r>
+              <a:rPr sz="1000" b="1" i="0" spc="250">
+                <a:solidFill>
+                  <a:srgbClr val="FFFFFF"/>
+                </a:solidFill>
+              </a:rPr>
+              <a:t>INSURANCE CHECK</a:t>
+            </a:r>
+          </a:p>
+        </p:txBody>
+      </p:sp>
       <p:sp>
         <p:nvSpPr>
           <p:cNvPr id="2" name="Title 1"/>
@@ -3329,8 +3409,8 @@
         </p:nvSpPr>
         <p:spPr>
           <a:xfrm>
-            <a:off x="853418" y="2057400"/>
-            <a:ext cx="6095847" cy="1554480"/>
+            <a:off x="822960" y="2606040"/>
+            <a:ext cx="5608179" cy="1188720"/>
           </a:xfrm>
         </p:spPr>
         <p:txBody>
@@ -3347,7 +3427,7 @@
             <a:r>
               <a:rPr sz="3600" b="1" i="0">
                 <a:solidFill>
-                  <a:srgbClr val="37261A"/>
+                  <a:srgbClr val="FFFFFF"/>
                 </a:solidFill>
               </a:rPr>
               <a:t>우리 보험 점검 시간</a:t>
@@ -3357,14 +3437,14 @@
       </p:sp>
       <p:sp>
         <p:nvSpPr>
-          <p:cNvPr id="4" name="한 줄 문구"/>
+          <p:cNvPr id="6" name="한 줄 문구"/>
           <p:cNvSpPr txBox="1"/>
           <p:nvPr/>
         </p:nvSpPr>
         <p:spPr>
           <a:xfrm>
-            <a:off x="853418" y="3749039"/>
-            <a:ext cx="6095847" cy="822960"/>
+            <a:off x="822960" y="3886200"/>
+            <a:ext cx="5608179" cy="822960"/>
           </a:xfrm>
           <a:prstGeom prst="rect">
             <a:avLst/>
@@ -3383,9 +3463,9 @@
               </a:lnSpc>
             </a:pPr>
             <a:r>
-              <a:rPr sz="1700" b="0" i="1">
+              <a:rPr sz="1700" b="0" i="0">
                 <a:solidFill>
-                  <a:srgbClr val="37261A"/>
+                  <a:srgbClr val="FFFFFF"/>
                 </a:solidFill>
               </a:rPr>
               <a:t>한 사람 앞으로만 몰려 있지 않은지 봅니다</a:t>
@@ -3395,14 +3475,14 @@
       </p:sp>
       <p:sp>
         <p:nvSpPr>
-          <p:cNvPr id="5" name="안내 문구"/>
+          <p:cNvPr id="7" name="안내 문구"/>
           <p:cNvSpPr txBox="1"/>
           <p:nvPr/>
         </p:nvSpPr>
         <p:spPr>
           <a:xfrm>
-            <a:off x="853418" y="4617720"/>
-            <a:ext cx="6095847" cy="914400"/>
+            <a:off x="822960" y="4754880"/>
+            <a:ext cx="5608179" cy="914400"/>
           </a:xfrm>
           <a:prstGeom prst="rect">
             <a:avLst/>
@@ -3423,10 +3503,10 @@
             <a:r>
               <a:rPr sz="1400" b="0" i="0">
                 <a:solidFill>
-                  <a:srgbClr val="666666"/>
+                  <a:srgbClr val="FFFFFF"/>
                 </a:solidFill>
               </a:rPr>
-              <a:t>부부 점검 · 2027. 00. 00</a:t>
+              <a:t>부부 점검 · 날짜 입력</a:t>
             </a:r>
           </a:p>
           <a:p>
@@ -3438,7 +3518,7 @@
             <a:r>
               <a:rPr sz="1400" b="0" i="0">
                 <a:solidFill>
-                  <a:srgbClr val="666666"/>
+                  <a:srgbClr val="FFFFFF"/>
                 </a:solidFill>
               </a:rPr>
               <a:t>가입 내용을 정리하고 함께 확인하는 양식</a:t>
@@ -3460,7 +3540,7 @@
     <p:bg>
       <p:bgPr>
         <a:solidFill>
-          <a:srgbClr val="FFFFFF"/>
+          <a:srgbClr val="FBF2EC"/>
         </a:solidFill>
         <a:effectLst/>
       </p:bgPr>
@@ -3480,14 +3560,83 @@
         </p:nvSpPr>
         <p:spPr>
           <a:xfrm>
-            <a:off x="0" y="384048"/>
-            <a:ext cx="9509522" cy="896112"/>
-          </a:xfrm>
-          <a:prstGeom prst="homePlate">
+            <a:off x="640080" y="566928"/>
+            <a:ext cx="64008" cy="868680"/>
+          </a:xfrm>
+          <a:prstGeom prst="roundRect">
+            <a:avLst>
+              <a:gd name="adj" fmla="val 50000"/>
+            </a:avLst>
+          </a:prstGeom>
+          <a:solidFill>
+            <a:srgbClr val="D89F79"/>
+          </a:solidFill>
+          <a:ln>
+            <a:noFill/>
+          </a:ln>
+        </p:spPr>
+        <p:txBody>
+          <a:bodyPr rtlCol="0" anchor="ctr"/>
+          <a:lstStyle/>
+          <a:p>
+            <a:pPr algn="ctr"/>
+          </a:p>
+        </p:txBody>
+      </p:sp>
+      <p:sp>
+        <p:nvSpPr>
+          <p:cNvPr id="4" name="상단 라벨"/>
+          <p:cNvSpPr txBox="1"/>
+          <p:nvPr/>
+        </p:nvSpPr>
+        <p:spPr>
+          <a:xfrm>
+            <a:off x="868680" y="274320"/>
+            <a:ext cx="5486400" cy="274320"/>
+          </a:xfrm>
+          <a:prstGeom prst="rect">
+            <a:avLst/>
+          </a:prstGeom>
+          <a:noFill/>
+        </p:spPr>
+        <p:txBody>
+          <a:bodyPr wrap="square" lIns="54864" rIns="54864" tIns="27432" bIns="27432" anchor="ctr">
+            <a:noAutofit/>
+          </a:bodyPr>
+          <a:lstStyle/>
+          <a:p>
+            <a:pPr algn="l">
+              <a:lnSpc>
+                <a:spcPct val="115000"/>
+              </a:lnSpc>
+            </a:pPr>
+            <a:r>
+              <a:rPr sz="900" b="1" i="0" spc="250">
+                <a:solidFill>
+                  <a:srgbClr val="8E8780"/>
+                </a:solidFill>
+              </a:rPr>
+              <a:t>INSURANCE CHECK</a:t>
+            </a:r>
+          </a:p>
+        </p:txBody>
+      </p:sp>
+      <p:sp>
+        <p:nvSpPr>
+          <p:cNvPr id="5" name="포인트"/>
+          <p:cNvSpPr/>
+          <p:nvPr/>
+        </p:nvSpPr>
+        <p:spPr>
+          <a:xfrm>
+            <a:off x="11167567" y="667512"/>
+            <a:ext cx="310896" cy="310896"/>
+          </a:xfrm>
+          <a:prstGeom prst="moon">
             <a:avLst/>
           </a:prstGeom>
           <a:solidFill>
-            <a:srgbClr val="765037"/>
+            <a:srgbClr val="EBC6AD"/>
           </a:solidFill>
           <a:ln>
             <a:noFill/>
@@ -3513,8 +3662,8 @@
         </p:nvSpPr>
         <p:spPr>
           <a:xfrm>
-            <a:off x="640080" y="411480"/>
-            <a:ext cx="8412242" cy="822960"/>
+            <a:off x="868680" y="566928"/>
+            <a:ext cx="9448495" cy="868680"/>
           </a:xfrm>
         </p:spPr>
         <p:txBody>
@@ -3531,7 +3680,7 @@
             <a:r>
               <a:rPr sz="3000" b="1" i="0">
                 <a:solidFill>
-                  <a:srgbClr val="FFFFFF"/>
+                  <a:srgbClr val="26231F"/>
                 </a:solidFill>
               </a:rPr>
               <a:t>점검 대상 현황</a:t>
@@ -3541,14 +3690,14 @@
       </p:sp>
       <p:graphicFrame>
         <p:nvGraphicFramePr>
-          <p:cNvPr id="4" name="표"/>
+          <p:cNvPr id="6" name="표"/>
           <p:cNvGraphicFramePr>
             <a:graphicFrameLocks noGrp="1"/>
           </p:cNvGraphicFramePr>
           <p:nvPr/>
         </p:nvGraphicFramePr>
         <p:xfrm>
-          <a:off x="640080" y="1645920"/>
+          <a:off x="640080" y="1783080"/>
           <a:ext cx="10911534" cy="3657600"/>
         </p:xfrm>
         <a:graphic>
@@ -3572,7 +3721,7 @@
                       <a:r>
                         <a:rPr sz="1600" b="1">
                           <a:solidFill>
-                            <a:srgbClr val="FFFFFF"/>
+                            <a:srgbClr val="26231F"/>
                           </a:solidFill>
                         </a:rPr>
                         <a:t>구분</a:t>
@@ -3582,30 +3731,30 @@
                   <a:tcPr anchor="ctr" marL="73152" marR="73152">
                     <a:lnL w="9525" cap="flat" cmpd="sng" algn="ctr">
                       <a:solidFill>
-                        <a:srgbClr val="765037"/>
+                        <a:srgbClr val="D89F79"/>
                       </a:solidFill>
                       <a:prstDash val="solid"/>
                     </a:lnL>
                     <a:lnR w="9525" cap="flat" cmpd="sng" algn="ctr">
                       <a:solidFill>
-                        <a:srgbClr val="765037"/>
+                        <a:srgbClr val="D89F79"/>
                       </a:solidFill>
                       <a:prstDash val="solid"/>
                     </a:lnR>
                     <a:lnT w="9525" cap="flat" cmpd="sng" algn="ctr">
                       <a:solidFill>
-                        <a:srgbClr val="765037"/>
+                        <a:srgbClr val="D89F79"/>
                       </a:solidFill>
                       <a:prstDash val="solid"/>
                     </a:lnT>
                     <a:lnB w="9525" cap="flat" cmpd="sng" algn="ctr">
                       <a:solidFill>
-                        <a:srgbClr val="765037"/>
+                        <a:srgbClr val="D89F79"/>
                       </a:solidFill>
                       <a:prstDash val="solid"/>
                     </a:lnB>
                     <a:solidFill>
-                      <a:srgbClr val="765037"/>
+                      <a:srgbClr val="D89F79"/>
                     </a:solidFill>
                   </a:tcPr>
                 </a:tc>
@@ -3618,7 +3767,7 @@
                       <a:r>
                         <a:rPr sz="1600" b="1">
                           <a:solidFill>
-                            <a:srgbClr val="FFFFFF"/>
+                            <a:srgbClr val="26231F"/>
                           </a:solidFill>
                         </a:rPr>
                         <a:t>남편</a:t>
@@ -3628,30 +3777,30 @@
                   <a:tcPr anchor="ctr" marL="73152" marR="73152">
                     <a:lnL w="9525" cap="flat" cmpd="sng" algn="ctr">
                       <a:solidFill>
-                        <a:srgbClr val="765037"/>
+                        <a:srgbClr val="D89F79"/>
                       </a:solidFill>
                       <a:prstDash val="solid"/>
                     </a:lnL>
                     <a:lnR w="9525" cap="flat" cmpd="sng" algn="ctr">
                       <a:solidFill>
-                        <a:srgbClr val="765037"/>
+                        <a:srgbClr val="D89F79"/>
                       </a:solidFill>
                       <a:prstDash val="solid"/>
                     </a:lnR>
                     <a:lnT w="9525" cap="flat" cmpd="sng" algn="ctr">
                       <a:solidFill>
-                        <a:srgbClr val="765037"/>
+                        <a:srgbClr val="D89F79"/>
                       </a:solidFill>
                       <a:prstDash val="solid"/>
                     </a:lnT>
                     <a:lnB w="9525" cap="flat" cmpd="sng" algn="ctr">
                       <a:solidFill>
-                        <a:srgbClr val="765037"/>
+                        <a:srgbClr val="D89F79"/>
                       </a:solidFill>
                       <a:prstDash val="solid"/>
                     </a:lnB>
                     <a:solidFill>
-                      <a:srgbClr val="765037"/>
+                      <a:srgbClr val="D89F79"/>
                     </a:solidFill>
                   </a:tcPr>
                 </a:tc>
@@ -3664,7 +3813,7 @@
                       <a:r>
                         <a:rPr sz="1600" b="1">
                           <a:solidFill>
-                            <a:srgbClr val="FFFFFF"/>
+                            <a:srgbClr val="26231F"/>
                           </a:solidFill>
                         </a:rPr>
                         <a:t>아내</a:t>
@@ -3674,30 +3823,30 @@
                   <a:tcPr anchor="ctr" marL="73152" marR="73152">
                     <a:lnL w="9525" cap="flat" cmpd="sng" algn="ctr">
                       <a:solidFill>
-                        <a:srgbClr val="765037"/>
+                        <a:srgbClr val="D89F79"/>
                       </a:solidFill>
                       <a:prstDash val="solid"/>
                     </a:lnL>
                     <a:lnR w="9525" cap="flat" cmpd="sng" algn="ctr">
                       <a:solidFill>
-                        <a:srgbClr val="765037"/>
+                        <a:srgbClr val="D89F79"/>
                       </a:solidFill>
                       <a:prstDash val="solid"/>
                     </a:lnR>
                     <a:lnT w="9525" cap="flat" cmpd="sng" algn="ctr">
                       <a:solidFill>
-                        <a:srgbClr val="765037"/>
+                        <a:srgbClr val="D89F79"/>
                       </a:solidFill>
                       <a:prstDash val="solid"/>
                     </a:lnT>
                     <a:lnB w="9525" cap="flat" cmpd="sng" algn="ctr">
                       <a:solidFill>
-                        <a:srgbClr val="765037"/>
+                        <a:srgbClr val="D89F79"/>
                       </a:solidFill>
                       <a:prstDash val="solid"/>
                     </a:lnB>
                     <a:solidFill>
-                      <a:srgbClr val="765037"/>
+                      <a:srgbClr val="D89F79"/>
                     </a:solidFill>
                   </a:tcPr>
                 </a:tc>
@@ -3712,7 +3861,7 @@
                       <a:r>
                         <a:rPr sz="1600" b="1">
                           <a:solidFill>
-                            <a:srgbClr val="37261A"/>
+                            <a:srgbClr val="493527"/>
                           </a:solidFill>
                         </a:rPr>
                         <a:t>이름</a:t>
@@ -3722,30 +3871,30 @@
                   <a:tcPr anchor="ctr" marL="73152" marR="73152">
                     <a:lnL w="9525" cap="flat" cmpd="sng" algn="ctr">
                       <a:solidFill>
-                        <a:srgbClr val="EDDED4"/>
+                        <a:srgbClr val="F6E2D5"/>
                       </a:solidFill>
                       <a:prstDash val="solid"/>
                     </a:lnL>
                     <a:lnR w="9525" cap="flat" cmpd="sng" algn="ctr">
                       <a:solidFill>
-                        <a:srgbClr val="EDDED4"/>
+                        <a:srgbClr val="F6E2D5"/>
                       </a:solidFill>
                       <a:prstDash val="solid"/>
                     </a:lnR>
                     <a:lnT w="9525" cap="flat" cmpd="sng" algn="ctr">
                       <a:solidFill>
-                        <a:srgbClr val="EDDED4"/>
+                        <a:srgbClr val="F6E2D5"/>
                       </a:solidFill>
                       <a:prstDash val="solid"/>
                     </a:lnT>
                     <a:lnB w="9525" cap="flat" cmpd="sng" algn="ctr">
                       <a:solidFill>
-                        <a:srgbClr val="EDDED4"/>
+                        <a:srgbClr val="F6E2D5"/>
                       </a:solidFill>
                       <a:prstDash val="solid"/>
                     </a:lnB>
                     <a:solidFill>
-                      <a:srgbClr val="EDDED4"/>
+                      <a:srgbClr val="F6E2D5"/>
                     </a:solidFill>
                   </a:tcPr>
                 </a:tc>
@@ -3758,7 +3907,7 @@
                       <a:r>
                         <a:rPr sz="1600" b="0">
                           <a:solidFill>
-                            <a:srgbClr val="2B2B2B"/>
+                            <a:srgbClr val="26231F"/>
                           </a:solidFill>
                         </a:rPr>
                         <a:t/>
@@ -3768,25 +3917,25 @@
                   <a:tcPr anchor="ctr" marL="73152" marR="73152">
                     <a:lnL w="9525" cap="flat" cmpd="sng" algn="ctr">
                       <a:solidFill>
-                        <a:srgbClr val="EDDED4"/>
+                        <a:srgbClr val="F6E2D5"/>
                       </a:solidFill>
                       <a:prstDash val="solid"/>
                     </a:lnL>
                     <a:lnR w="9525" cap="flat" cmpd="sng" algn="ctr">
                       <a:solidFill>
-                        <a:srgbClr val="EDDED4"/>
+                        <a:srgbClr val="F6E2D5"/>
                       </a:solidFill>
                       <a:prstDash val="solid"/>
                     </a:lnR>
                     <a:lnT w="9525" cap="flat" cmpd="sng" algn="ctr">
                       <a:solidFill>
-                        <a:srgbClr val="EDDED4"/>
+                        <a:srgbClr val="F6E2D5"/>
                       </a:solidFill>
                       <a:prstDash val="solid"/>
                     </a:lnT>
                     <a:lnB w="9525" cap="flat" cmpd="sng" algn="ctr">
                       <a:solidFill>
-                        <a:srgbClr val="EDDED4"/>
+                        <a:srgbClr val="F6E2D5"/>
                       </a:solidFill>
                       <a:prstDash val="solid"/>
                     </a:lnB>
@@ -3804,7 +3953,7 @@
                       <a:r>
                         <a:rPr sz="1600" b="0">
                           <a:solidFill>
-                            <a:srgbClr val="2B2B2B"/>
+                            <a:srgbClr val="26231F"/>
                           </a:solidFill>
                         </a:rPr>
                         <a:t/>
@@ -3814,25 +3963,25 @@
                   <a:tcPr anchor="ctr" marL="73152" marR="73152">
                     <a:lnL w="9525" cap="flat" cmpd="sng" algn="ctr">
                       <a:solidFill>
-                        <a:srgbClr val="EDDED4"/>
+                        <a:srgbClr val="F6E2D5"/>
                       </a:solidFill>
                       <a:prstDash val="solid"/>
                     </a:lnL>
                     <a:lnR w="9525" cap="flat" cmpd="sng" algn="ctr">
                       <a:solidFill>
-                        <a:srgbClr val="EDDED4"/>
+                        <a:srgbClr val="F6E2D5"/>
                       </a:solidFill>
                       <a:prstDash val="solid"/>
                     </a:lnR>
                     <a:lnT w="9525" cap="flat" cmpd="sng" algn="ctr">
                       <a:solidFill>
-                        <a:srgbClr val="EDDED4"/>
+                        <a:srgbClr val="F6E2D5"/>
                       </a:solidFill>
                       <a:prstDash val="solid"/>
                     </a:lnT>
                     <a:lnB w="9525" cap="flat" cmpd="sng" algn="ctr">
                       <a:solidFill>
-                        <a:srgbClr val="EDDED4"/>
+                        <a:srgbClr val="F6E2D5"/>
                       </a:solidFill>
                       <a:prstDash val="solid"/>
                     </a:lnB>
@@ -3852,7 +4001,7 @@
                       <a:r>
                         <a:rPr sz="1600" b="1">
                           <a:solidFill>
-                            <a:srgbClr val="37261A"/>
+                            <a:srgbClr val="493527"/>
                           </a:solidFill>
                         </a:rPr>
                         <a:t>나이</a:t>
@@ -3862,30 +4011,30 @@
                   <a:tcPr anchor="ctr" marL="73152" marR="73152">
                     <a:lnL w="9525" cap="flat" cmpd="sng" algn="ctr">
                       <a:solidFill>
-                        <a:srgbClr val="EDDED4"/>
+                        <a:srgbClr val="F6E2D5"/>
                       </a:solidFill>
                       <a:prstDash val="solid"/>
                     </a:lnL>
                     <a:lnR w="9525" cap="flat" cmpd="sng" algn="ctr">
                       <a:solidFill>
-                        <a:srgbClr val="EDDED4"/>
+                        <a:srgbClr val="F6E2D5"/>
                       </a:solidFill>
                       <a:prstDash val="solid"/>
                     </a:lnR>
                     <a:lnT w="9525" cap="flat" cmpd="sng" algn="ctr">
                       <a:solidFill>
-                        <a:srgbClr val="EDDED4"/>
+                        <a:srgbClr val="F6E2D5"/>
                       </a:solidFill>
                       <a:prstDash val="solid"/>
                     </a:lnT>
                     <a:lnB w="9525" cap="flat" cmpd="sng" algn="ctr">
                       <a:solidFill>
-                        <a:srgbClr val="EDDED4"/>
+                        <a:srgbClr val="F6E2D5"/>
                       </a:solidFill>
                       <a:prstDash val="solid"/>
                     </a:lnB>
                     <a:solidFill>
-                      <a:srgbClr val="EDDED4"/>
+                      <a:srgbClr val="F6E2D5"/>
                     </a:solidFill>
                   </a:tcPr>
                 </a:tc>
@@ -3898,7 +4047,7 @@
                       <a:r>
                         <a:rPr sz="1600" b="0">
                           <a:solidFill>
-                            <a:srgbClr val="2B2B2B"/>
+                            <a:srgbClr val="26231F"/>
                           </a:solidFill>
                         </a:rPr>
                         <a:t/>
@@ -3908,30 +4057,30 @@
                   <a:tcPr anchor="ctr" marL="73152" marR="73152">
                     <a:lnL w="9525" cap="flat" cmpd="sng" algn="ctr">
                       <a:solidFill>
-                        <a:srgbClr val="EDDED4"/>
+                        <a:srgbClr val="F6E2D5"/>
                       </a:solidFill>
                       <a:prstDash val="solid"/>
                     </a:lnL>
                     <a:lnR w="9525" cap="flat" cmpd="sng" algn="ctr">
                       <a:solidFill>
-                        <a:srgbClr val="EDDED4"/>
+                        <a:srgbClr val="F6E2D5"/>
                       </a:solidFill>
                       <a:prstDash val="solid"/>
                     </a:lnR>
                     <a:lnT w="9525" cap="flat" cmpd="sng" algn="ctr">
                       <a:solidFill>
-                        <a:srgbClr val="EDDED4"/>
+                        <a:srgbClr val="F6E2D5"/>
                       </a:solidFill>
                       <a:prstDash val="solid"/>
                     </a:lnT>
                     <a:lnB w="9525" cap="flat" cmpd="sng" algn="ctr">
                       <a:solidFill>
-                        <a:srgbClr val="EDDED4"/>
+                        <a:srgbClr val="F6E2D5"/>
                       </a:solidFill>
                       <a:prstDash val="solid"/>
                     </a:lnB>
                     <a:solidFill>
-                      <a:srgbClr val="F8F4F1"/>
+                      <a:srgbClr val="FBF2EC"/>
                     </a:solidFill>
                   </a:tcPr>
                 </a:tc>
@@ -3944,7 +4093,7 @@
                       <a:r>
                         <a:rPr sz="1600" b="0">
                           <a:solidFill>
-                            <a:srgbClr val="2B2B2B"/>
+                            <a:srgbClr val="26231F"/>
                           </a:solidFill>
                         </a:rPr>
                         <a:t/>
@@ -3954,30 +4103,30 @@
                   <a:tcPr anchor="ctr" marL="73152" marR="73152">
                     <a:lnL w="9525" cap="flat" cmpd="sng" algn="ctr">
                       <a:solidFill>
-                        <a:srgbClr val="EDDED4"/>
+                        <a:srgbClr val="F6E2D5"/>
                       </a:solidFill>
                       <a:prstDash val="solid"/>
                     </a:lnL>
                     <a:lnR w="9525" cap="flat" cmpd="sng" algn="ctr">
                       <a:solidFill>
-                        <a:srgbClr val="EDDED4"/>
+                        <a:srgbClr val="F6E2D5"/>
                       </a:solidFill>
                       <a:prstDash val="solid"/>
                     </a:lnR>
                     <a:lnT w="9525" cap="flat" cmpd="sng" algn="ctr">
                       <a:solidFill>
-                        <a:srgbClr val="EDDED4"/>
+                        <a:srgbClr val="F6E2D5"/>
                       </a:solidFill>
                       <a:prstDash val="solid"/>
                     </a:lnT>
                     <a:lnB w="9525" cap="flat" cmpd="sng" algn="ctr">
                       <a:solidFill>
-                        <a:srgbClr val="EDDED4"/>
+                        <a:srgbClr val="F6E2D5"/>
                       </a:solidFill>
                       <a:prstDash val="solid"/>
                     </a:lnB>
                     <a:solidFill>
-                      <a:srgbClr val="F8F4F1"/>
+                      <a:srgbClr val="FBF2EC"/>
                     </a:solidFill>
                   </a:tcPr>
                 </a:tc>
@@ -3992,7 +4141,7 @@
                       <a:r>
                         <a:rPr sz="1600" b="1">
                           <a:solidFill>
-                            <a:srgbClr val="37261A"/>
+                            <a:srgbClr val="493527"/>
                           </a:solidFill>
                         </a:rPr>
                         <a:t>직업</a:t>
@@ -4002,30 +4151,30 @@
                   <a:tcPr anchor="ctr" marL="73152" marR="73152">
                     <a:lnL w="9525" cap="flat" cmpd="sng" algn="ctr">
                       <a:solidFill>
-                        <a:srgbClr val="EDDED4"/>
+                        <a:srgbClr val="F6E2D5"/>
                       </a:solidFill>
                       <a:prstDash val="solid"/>
                     </a:lnL>
                     <a:lnR w="9525" cap="flat" cmpd="sng" algn="ctr">
                       <a:solidFill>
-                        <a:srgbClr val="EDDED4"/>
+                        <a:srgbClr val="F6E2D5"/>
                       </a:solidFill>
                       <a:prstDash val="solid"/>
                     </a:lnR>
                     <a:lnT w="9525" cap="flat" cmpd="sng" algn="ctr">
                       <a:solidFill>
-                        <a:srgbClr val="EDDED4"/>
+                        <a:srgbClr val="F6E2D5"/>
                       </a:solidFill>
                       <a:prstDash val="solid"/>
                     </a:lnT>
                     <a:lnB w="9525" cap="flat" cmpd="sng" algn="ctr">
                       <a:solidFill>
-                        <a:srgbClr val="EDDED4"/>
+                        <a:srgbClr val="F6E2D5"/>
                       </a:solidFill>
                       <a:prstDash val="solid"/>
                     </a:lnB>
                     <a:solidFill>
-                      <a:srgbClr val="EDDED4"/>
+                      <a:srgbClr val="F6E2D5"/>
                     </a:solidFill>
                   </a:tcPr>
                 </a:tc>
@@ -4038,7 +4187,7 @@
                       <a:r>
                         <a:rPr sz="1600" b="0">
                           <a:solidFill>
-                            <a:srgbClr val="2B2B2B"/>
+                            <a:srgbClr val="26231F"/>
                           </a:solidFill>
                         </a:rPr>
                         <a:t/>
@@ -4048,25 +4197,25 @@
                   <a:tcPr anchor="ctr" marL="73152" marR="73152">
                     <a:lnL w="9525" cap="flat" cmpd="sng" algn="ctr">
                       <a:solidFill>
-                        <a:srgbClr val="EDDED4"/>
+                        <a:srgbClr val="F6E2D5"/>
                       </a:solidFill>
                       <a:prstDash val="solid"/>
                     </a:lnL>
                     <a:lnR w="9525" cap="flat" cmpd="sng" algn="ctr">
                       <a:solidFill>
-                        <a:srgbClr val="EDDED4"/>
+                        <a:srgbClr val="F6E2D5"/>
                       </a:solidFill>
                       <a:prstDash val="solid"/>
                     </a:lnR>
                     <a:lnT w="9525" cap="flat" cmpd="sng" algn="ctr">
                       <a:solidFill>
-                        <a:srgbClr val="EDDED4"/>
+                        <a:srgbClr val="F6E2D5"/>
                       </a:solidFill>
                       <a:prstDash val="solid"/>
                     </a:lnT>
                     <a:lnB w="9525" cap="flat" cmpd="sng" algn="ctr">
                       <a:solidFill>
-                        <a:srgbClr val="EDDED4"/>
+                        <a:srgbClr val="F6E2D5"/>
                       </a:solidFill>
                       <a:prstDash val="solid"/>
                     </a:lnB>
@@ -4084,7 +4233,7 @@
                       <a:r>
                         <a:rPr sz="1600" b="0">
                           <a:solidFill>
-                            <a:srgbClr val="2B2B2B"/>
+                            <a:srgbClr val="26231F"/>
                           </a:solidFill>
                         </a:rPr>
                         <a:t/>
@@ -4094,25 +4243,25 @@
                   <a:tcPr anchor="ctr" marL="73152" marR="73152">
                     <a:lnL w="9525" cap="flat" cmpd="sng" algn="ctr">
                       <a:solidFill>
-                        <a:srgbClr val="EDDED4"/>
+                        <a:srgbClr val="F6E2D5"/>
                       </a:solidFill>
                       <a:prstDash val="solid"/>
                     </a:lnL>
                     <a:lnR w="9525" cap="flat" cmpd="sng" algn="ctr">
                       <a:solidFill>
-                        <a:srgbClr val="EDDED4"/>
+                        <a:srgbClr val="F6E2D5"/>
                       </a:solidFill>
                       <a:prstDash val="solid"/>
                     </a:lnR>
                     <a:lnT w="9525" cap="flat" cmpd="sng" algn="ctr">
                       <a:solidFill>
-                        <a:srgbClr val="EDDED4"/>
+                        <a:srgbClr val="F6E2D5"/>
                       </a:solidFill>
                       <a:prstDash val="solid"/>
                     </a:lnT>
                     <a:lnB w="9525" cap="flat" cmpd="sng" algn="ctr">
                       <a:solidFill>
-                        <a:srgbClr val="EDDED4"/>
+                        <a:srgbClr val="F6E2D5"/>
                       </a:solidFill>
                       <a:prstDash val="solid"/>
                     </a:lnB>
@@ -4132,7 +4281,7 @@
                       <a:r>
                         <a:rPr sz="1600" b="1">
                           <a:solidFill>
-                            <a:srgbClr val="37261A"/>
+                            <a:srgbClr val="493527"/>
                           </a:solidFill>
                         </a:rPr>
                         <a:t>건강 상태 메모</a:t>
@@ -4142,30 +4291,30 @@
                   <a:tcPr anchor="ctr" marL="73152" marR="73152">
                     <a:lnL w="9525" cap="flat" cmpd="sng" algn="ctr">
                       <a:solidFill>
-                        <a:srgbClr val="EDDED4"/>
+                        <a:srgbClr val="F6E2D5"/>
                       </a:solidFill>
                       <a:prstDash val="solid"/>
                     </a:lnL>
                     <a:lnR w="9525" cap="flat" cmpd="sng" algn="ctr">
                       <a:solidFill>
-                        <a:srgbClr val="EDDED4"/>
+                        <a:srgbClr val="F6E2D5"/>
                       </a:solidFill>
                       <a:prstDash val="solid"/>
                     </a:lnR>
                     <a:lnT w="9525" cap="flat" cmpd="sng" algn="ctr">
                       <a:solidFill>
-                        <a:srgbClr val="EDDED4"/>
+                        <a:srgbClr val="F6E2D5"/>
                       </a:solidFill>
                       <a:prstDash val="solid"/>
                     </a:lnT>
                     <a:lnB w="9525" cap="flat" cmpd="sng" algn="ctr">
                       <a:solidFill>
-                        <a:srgbClr val="EDDED4"/>
+                        <a:srgbClr val="F6E2D5"/>
                       </a:solidFill>
                       <a:prstDash val="solid"/>
                     </a:lnB>
                     <a:solidFill>
-                      <a:srgbClr val="EDDED4"/>
+                      <a:srgbClr val="F6E2D5"/>
                     </a:solidFill>
                   </a:tcPr>
                 </a:tc>
@@ -4178,7 +4327,7 @@
                       <a:r>
                         <a:rPr sz="1600" b="0">
                           <a:solidFill>
-                            <a:srgbClr val="2B2B2B"/>
+                            <a:srgbClr val="26231F"/>
                           </a:solidFill>
                         </a:rPr>
                         <a:t/>
@@ -4188,30 +4337,30 @@
                   <a:tcPr anchor="ctr" marL="73152" marR="73152">
                     <a:lnL w="9525" cap="flat" cmpd="sng" algn="ctr">
                       <a:solidFill>
-                        <a:srgbClr val="EDDED4"/>
+                        <a:srgbClr val="F6E2D5"/>
                       </a:solidFill>
                       <a:prstDash val="solid"/>
                     </a:lnL>
                     <a:lnR w="9525" cap="flat" cmpd="sng" algn="ctr">
                       <a:solidFill>
-                        <a:srgbClr val="EDDED4"/>
+                        <a:srgbClr val="F6E2D5"/>
                       </a:solidFill>
                       <a:prstDash val="solid"/>
                     </a:lnR>
                     <a:lnT w="9525" cap="flat" cmpd="sng" algn="ctr">
                       <a:solidFill>
-                        <a:srgbClr val="EDDED4"/>
+                        <a:srgbClr val="F6E2D5"/>
                       </a:solidFill>
                       <a:prstDash val="solid"/>
                     </a:lnT>
                     <a:lnB w="9525" cap="flat" cmpd="sng" algn="ctr">
                       <a:solidFill>
-                        <a:srgbClr val="EDDED4"/>
+                        <a:srgbClr val="F6E2D5"/>
                       </a:solidFill>
                       <a:prstDash val="solid"/>
                     </a:lnB>
                     <a:solidFill>
-                      <a:srgbClr val="F8F4F1"/>
+                      <a:srgbClr val="FBF2EC"/>
                     </a:solidFill>
                   </a:tcPr>
                 </a:tc>
@@ -4224,7 +4373,7 @@
                       <a:r>
                         <a:rPr sz="1600" b="0">
                           <a:solidFill>
-                            <a:srgbClr val="2B2B2B"/>
+                            <a:srgbClr val="26231F"/>
                           </a:solidFill>
                         </a:rPr>
                         <a:t/>
@@ -4234,30 +4383,30 @@
                   <a:tcPr anchor="ctr" marL="73152" marR="73152">
                     <a:lnL w="9525" cap="flat" cmpd="sng" algn="ctr">
                       <a:solidFill>
-                        <a:srgbClr val="EDDED4"/>
+                        <a:srgbClr val="F6E2D5"/>
                       </a:solidFill>
                       <a:prstDash val="solid"/>
                     </a:lnL>
                     <a:lnR w="9525" cap="flat" cmpd="sng" algn="ctr">
                       <a:solidFill>
-                        <a:srgbClr val="EDDED4"/>
+                        <a:srgbClr val="F6E2D5"/>
                       </a:solidFill>
                       <a:prstDash val="solid"/>
                     </a:lnR>
                     <a:lnT w="9525" cap="flat" cmpd="sng" algn="ctr">
                       <a:solidFill>
-                        <a:srgbClr val="EDDED4"/>
+                        <a:srgbClr val="F6E2D5"/>
                       </a:solidFill>
                       <a:prstDash val="solid"/>
                     </a:lnT>
                     <a:lnB w="9525" cap="flat" cmpd="sng" algn="ctr">
                       <a:solidFill>
-                        <a:srgbClr val="EDDED4"/>
+                        <a:srgbClr val="F6E2D5"/>
                       </a:solidFill>
                       <a:prstDash val="solid"/>
                     </a:lnB>
                     <a:solidFill>
-                      <a:srgbClr val="F8F4F1"/>
+                      <a:srgbClr val="FBF2EC"/>
                     </a:solidFill>
                   </a:tcPr>
                 </a:tc>
@@ -4280,7 +4429,7 @@
     <p:bg>
       <p:bgPr>
         <a:solidFill>
-          <a:srgbClr val="FFFFFF"/>
+          <a:srgbClr val="FBF2EC"/>
         </a:solidFill>
         <a:effectLst/>
       </p:bgPr>
@@ -4300,14 +4449,83 @@
         </p:nvSpPr>
         <p:spPr>
           <a:xfrm>
-            <a:off x="0" y="384048"/>
-            <a:ext cx="9509522" cy="896112"/>
-          </a:xfrm>
-          <a:prstGeom prst="homePlate">
+            <a:off x="640080" y="566928"/>
+            <a:ext cx="64008" cy="868680"/>
+          </a:xfrm>
+          <a:prstGeom prst="roundRect">
+            <a:avLst>
+              <a:gd name="adj" fmla="val 50000"/>
+            </a:avLst>
+          </a:prstGeom>
+          <a:solidFill>
+            <a:srgbClr val="D89F79"/>
+          </a:solidFill>
+          <a:ln>
+            <a:noFill/>
+          </a:ln>
+        </p:spPr>
+        <p:txBody>
+          <a:bodyPr rtlCol="0" anchor="ctr"/>
+          <a:lstStyle/>
+          <a:p>
+            <a:pPr algn="ctr"/>
+          </a:p>
+        </p:txBody>
+      </p:sp>
+      <p:sp>
+        <p:nvSpPr>
+          <p:cNvPr id="4" name="상단 라벨"/>
+          <p:cNvSpPr txBox="1"/>
+          <p:nvPr/>
+        </p:nvSpPr>
+        <p:spPr>
+          <a:xfrm>
+            <a:off x="868680" y="274320"/>
+            <a:ext cx="5486400" cy="274320"/>
+          </a:xfrm>
+          <a:prstGeom prst="rect">
+            <a:avLst/>
+          </a:prstGeom>
+          <a:noFill/>
+        </p:spPr>
+        <p:txBody>
+          <a:bodyPr wrap="square" lIns="54864" rIns="54864" tIns="27432" bIns="27432" anchor="ctr">
+            <a:noAutofit/>
+          </a:bodyPr>
+          <a:lstStyle/>
+          <a:p>
+            <a:pPr algn="l">
+              <a:lnSpc>
+                <a:spcPct val="115000"/>
+              </a:lnSpc>
+            </a:pPr>
+            <a:r>
+              <a:rPr sz="900" b="1" i="0" spc="250">
+                <a:solidFill>
+                  <a:srgbClr val="8E8780"/>
+                </a:solidFill>
+              </a:rPr>
+              <a:t>INSURANCE CHECK</a:t>
+            </a:r>
+          </a:p>
+        </p:txBody>
+      </p:sp>
+      <p:sp>
+        <p:nvSpPr>
+          <p:cNvPr id="5" name="포인트"/>
+          <p:cNvSpPr/>
+          <p:nvPr/>
+        </p:nvSpPr>
+        <p:spPr>
+          <a:xfrm>
+            <a:off x="11167567" y="667512"/>
+            <a:ext cx="310896" cy="310896"/>
+          </a:xfrm>
+          <a:prstGeom prst="moon">
             <a:avLst/>
           </a:prstGeom>
           <a:solidFill>
-            <a:srgbClr val="765037"/>
+            <a:srgbClr val="EBC6AD"/>
           </a:solidFill>
           <a:ln>
             <a:noFill/>
@@ -4333,8 +4551,8 @@
         </p:nvSpPr>
         <p:spPr>
           <a:xfrm>
-            <a:off x="640080" y="411480"/>
-            <a:ext cx="8412242" cy="822960"/>
+            <a:off x="868680" y="566928"/>
+            <a:ext cx="9448495" cy="868680"/>
           </a:xfrm>
         </p:spPr>
         <p:txBody>
@@ -4351,7 +4569,7 @@
             <a:r>
               <a:rPr sz="3000" b="1" i="0">
                 <a:solidFill>
-                  <a:srgbClr val="FFFFFF"/>
+                  <a:srgbClr val="26231F"/>
                 </a:solidFill>
               </a:rPr>
               <a:t>가입한 보험 목록</a:t>
@@ -4361,14 +4579,14 @@
       </p:sp>
       <p:graphicFrame>
         <p:nvGraphicFramePr>
-          <p:cNvPr id="4" name="표"/>
+          <p:cNvPr id="6" name="표"/>
           <p:cNvGraphicFramePr>
             <a:graphicFrameLocks noGrp="1"/>
           </p:cNvGraphicFramePr>
           <p:nvPr/>
         </p:nvGraphicFramePr>
         <p:xfrm>
-          <a:off x="640080" y="1645920"/>
+          <a:off x="640080" y="1783080"/>
           <a:ext cx="10911535" cy="4224528"/>
         </p:xfrm>
         <a:graphic>
@@ -4394,7 +4612,7 @@
                       <a:r>
                         <a:rPr sz="1400" b="1">
                           <a:solidFill>
-                            <a:srgbClr val="FFFFFF"/>
+                            <a:srgbClr val="26231F"/>
                           </a:solidFill>
                         </a:rPr>
                         <a:t>보험회사</a:t>
@@ -4404,30 +4622,30 @@
                   <a:tcPr anchor="ctr" marL="73152" marR="73152">
                     <a:lnL w="9525" cap="flat" cmpd="sng" algn="ctr">
                       <a:solidFill>
-                        <a:srgbClr val="765037"/>
+                        <a:srgbClr val="D89F79"/>
                       </a:solidFill>
                       <a:prstDash val="solid"/>
                     </a:lnL>
                     <a:lnR w="9525" cap="flat" cmpd="sng" algn="ctr">
                       <a:solidFill>
-                        <a:srgbClr val="765037"/>
+                        <a:srgbClr val="D89F79"/>
                       </a:solidFill>
                       <a:prstDash val="solid"/>
                     </a:lnR>
                     <a:lnT w="9525" cap="flat" cmpd="sng" algn="ctr">
                       <a:solidFill>
-                        <a:srgbClr val="765037"/>
+                        <a:srgbClr val="D89F79"/>
                       </a:solidFill>
                       <a:prstDash val="solid"/>
                     </a:lnT>
                     <a:lnB w="9525" cap="flat" cmpd="sng" algn="ctr">
                       <a:solidFill>
-                        <a:srgbClr val="765037"/>
+                        <a:srgbClr val="D89F79"/>
                       </a:solidFill>
                       <a:prstDash val="solid"/>
                     </a:lnB>
                     <a:solidFill>
-                      <a:srgbClr val="765037"/>
+                      <a:srgbClr val="D89F79"/>
                     </a:solidFill>
                   </a:tcPr>
                 </a:tc>
@@ -4440,7 +4658,7 @@
                       <a:r>
                         <a:rPr sz="1400" b="1">
                           <a:solidFill>
-                            <a:srgbClr val="FFFFFF"/>
+                            <a:srgbClr val="26231F"/>
                           </a:solidFill>
                         </a:rPr>
                         <a:t>상품명</a:t>
@@ -4450,30 +4668,30 @@
                   <a:tcPr anchor="ctr" marL="73152" marR="73152">
                     <a:lnL w="9525" cap="flat" cmpd="sng" algn="ctr">
                       <a:solidFill>
-                        <a:srgbClr val="765037"/>
+                        <a:srgbClr val="D89F79"/>
                       </a:solidFill>
                       <a:prstDash val="solid"/>
                     </a:lnL>
                     <a:lnR w="9525" cap="flat" cmpd="sng" algn="ctr">
                       <a:solidFill>
-                        <a:srgbClr val="765037"/>
+                        <a:srgbClr val="D89F79"/>
                       </a:solidFill>
                       <a:prstDash val="solid"/>
                     </a:lnR>
                     <a:lnT w="9525" cap="flat" cmpd="sng" algn="ctr">
                       <a:solidFill>
-                        <a:srgbClr val="765037"/>
+                        <a:srgbClr val="D89F79"/>
                       </a:solidFill>
                       <a:prstDash val="solid"/>
                     </a:lnT>
                     <a:lnB w="9525" cap="flat" cmpd="sng" algn="ctr">
                       <a:solidFill>
-                        <a:srgbClr val="765037"/>
+                        <a:srgbClr val="D89F79"/>
                       </a:solidFill>
                       <a:prstDash val="solid"/>
                     </a:lnB>
                     <a:solidFill>
-                      <a:srgbClr val="765037"/>
+                      <a:srgbClr val="D89F79"/>
                     </a:solidFill>
                   </a:tcPr>
                 </a:tc>
@@ -4486,7 +4704,7 @@
                       <a:r>
                         <a:rPr sz="1400" b="1">
                           <a:solidFill>
-                            <a:srgbClr val="FFFFFF"/>
+                            <a:srgbClr val="26231F"/>
                           </a:solidFill>
                         </a:rPr>
                         <a:t>종류</a:t>
@@ -4496,30 +4714,30 @@
                   <a:tcPr anchor="ctr" marL="73152" marR="73152">
                     <a:lnL w="9525" cap="flat" cmpd="sng" algn="ctr">
                       <a:solidFill>
-                        <a:srgbClr val="765037"/>
+                        <a:srgbClr val="D89F79"/>
                       </a:solidFill>
                       <a:prstDash val="solid"/>
                     </a:lnL>
                     <a:lnR w="9525" cap="flat" cmpd="sng" algn="ctr">
                       <a:solidFill>
-                        <a:srgbClr val="765037"/>
+                        <a:srgbClr val="D89F79"/>
                       </a:solidFill>
                       <a:prstDash val="solid"/>
                     </a:lnR>
                     <a:lnT w="9525" cap="flat" cmpd="sng" algn="ctr">
                       <a:solidFill>
-                        <a:srgbClr val="765037"/>
+                        <a:srgbClr val="D89F79"/>
                       </a:solidFill>
                       <a:prstDash val="solid"/>
                     </a:lnT>
                     <a:lnB w="9525" cap="flat" cmpd="sng" algn="ctr">
                       <a:solidFill>
-                        <a:srgbClr val="765037"/>
+                        <a:srgbClr val="D89F79"/>
                       </a:solidFill>
                       <a:prstDash val="solid"/>
                     </a:lnB>
                     <a:solidFill>
-                      <a:srgbClr val="765037"/>
+                      <a:srgbClr val="D89F79"/>
                     </a:solidFill>
                   </a:tcPr>
                 </a:tc>
@@ -4532,7 +4750,7 @@
                       <a:r>
                         <a:rPr sz="1400" b="1">
                           <a:solidFill>
-                            <a:srgbClr val="FFFFFF"/>
+                            <a:srgbClr val="26231F"/>
                           </a:solidFill>
                         </a:rPr>
                         <a:t>만기일</a:t>
@@ -4542,30 +4760,30 @@
                   <a:tcPr anchor="ctr" marL="73152" marR="73152">
                     <a:lnL w="9525" cap="flat" cmpd="sng" algn="ctr">
                       <a:solidFill>
-                        <a:srgbClr val="765037"/>
+                        <a:srgbClr val="D89F79"/>
                       </a:solidFill>
                       <a:prstDash val="solid"/>
                     </a:lnL>
                     <a:lnR w="9525" cap="flat" cmpd="sng" algn="ctr">
                       <a:solidFill>
-                        <a:srgbClr val="765037"/>
+                        <a:srgbClr val="D89F79"/>
                       </a:solidFill>
                       <a:prstDash val="solid"/>
                     </a:lnR>
                     <a:lnT w="9525" cap="flat" cmpd="sng" algn="ctr">
                       <a:solidFill>
-                        <a:srgbClr val="765037"/>
+                        <a:srgbClr val="D89F79"/>
                       </a:solidFill>
                       <a:prstDash val="solid"/>
                     </a:lnT>
                     <a:lnB w="9525" cap="flat" cmpd="sng" algn="ctr">
                       <a:solidFill>
-                        <a:srgbClr val="765037"/>
+                        <a:srgbClr val="D89F79"/>
                       </a:solidFill>
                       <a:prstDash val="solid"/>
                     </a:lnB>
                     <a:solidFill>
-                      <a:srgbClr val="765037"/>
+                      <a:srgbClr val="D89F79"/>
                     </a:solidFill>
                   </a:tcPr>
                 </a:tc>
@@ -4578,7 +4796,7 @@
                       <a:r>
                         <a:rPr sz="1400" b="1">
                           <a:solidFill>
-                            <a:srgbClr val="FFFFFF"/>
+                            <a:srgbClr val="26231F"/>
                           </a:solidFill>
                         </a:rPr>
                         <a:t>월 보험료</a:t>
@@ -4588,30 +4806,30 @@
                   <a:tcPr anchor="ctr" marL="73152" marR="73152">
                     <a:lnL w="9525" cap="flat" cmpd="sng" algn="ctr">
                       <a:solidFill>
-                        <a:srgbClr val="765037"/>
+                        <a:srgbClr val="D89F79"/>
                       </a:solidFill>
                       <a:prstDash val="solid"/>
                     </a:lnL>
                     <a:lnR w="9525" cap="flat" cmpd="sng" algn="ctr">
                       <a:solidFill>
-                        <a:srgbClr val="765037"/>
+                        <a:srgbClr val="D89F79"/>
                       </a:solidFill>
                       <a:prstDash val="solid"/>
                     </a:lnR>
                     <a:lnT w="9525" cap="flat" cmpd="sng" algn="ctr">
                       <a:solidFill>
-                        <a:srgbClr val="765037"/>
+                        <a:srgbClr val="D89F79"/>
                       </a:solidFill>
                       <a:prstDash val="solid"/>
                     </a:lnT>
                     <a:lnB w="9525" cap="flat" cmpd="sng" algn="ctr">
                       <a:solidFill>
-                        <a:srgbClr val="765037"/>
+                        <a:srgbClr val="D89F79"/>
                       </a:solidFill>
                       <a:prstDash val="solid"/>
                     </a:lnB>
                     <a:solidFill>
-                      <a:srgbClr val="765037"/>
+                      <a:srgbClr val="D89F79"/>
                     </a:solidFill>
                   </a:tcPr>
                 </a:tc>
@@ -4626,7 +4844,7 @@
                       <a:r>
                         <a:rPr sz="1400" b="0">
                           <a:solidFill>
-                            <a:srgbClr val="2B2B2B"/>
+                            <a:srgbClr val="26231F"/>
                           </a:solidFill>
                         </a:rPr>
                         <a:t/>
@@ -4636,25 +4854,25 @@
                   <a:tcPr anchor="ctr" marL="73152" marR="73152">
                     <a:lnL w="9525" cap="flat" cmpd="sng" algn="ctr">
                       <a:solidFill>
-                        <a:srgbClr val="EDDED4"/>
+                        <a:srgbClr val="F6E2D5"/>
                       </a:solidFill>
                       <a:prstDash val="solid"/>
                     </a:lnL>
                     <a:lnR w="9525" cap="flat" cmpd="sng" algn="ctr">
                       <a:solidFill>
-                        <a:srgbClr val="EDDED4"/>
+                        <a:srgbClr val="F6E2D5"/>
                       </a:solidFill>
                       <a:prstDash val="solid"/>
                     </a:lnR>
                     <a:lnT w="9525" cap="flat" cmpd="sng" algn="ctr">
                       <a:solidFill>
-                        <a:srgbClr val="EDDED4"/>
+                        <a:srgbClr val="F6E2D5"/>
                       </a:solidFill>
                       <a:prstDash val="solid"/>
                     </a:lnT>
                     <a:lnB w="9525" cap="flat" cmpd="sng" algn="ctr">
                       <a:solidFill>
-                        <a:srgbClr val="EDDED4"/>
+                        <a:srgbClr val="F6E2D5"/>
                       </a:solidFill>
                       <a:prstDash val="solid"/>
                     </a:lnB>
@@ -4672,7 +4890,7 @@
                       <a:r>
                         <a:rPr sz="1400" b="0">
                           <a:solidFill>
-                            <a:srgbClr val="2B2B2B"/>
+                            <a:srgbClr val="26231F"/>
                           </a:solidFill>
                         </a:rPr>
                         <a:t/>
@@ -4682,25 +4900,25 @@
                   <a:tcPr anchor="ctr" marL="73152" marR="73152">
                     <a:lnL w="9525" cap="flat" cmpd="sng" algn="ctr">
                       <a:solidFill>
-                        <a:srgbClr val="EDDED4"/>
+                        <a:srgbClr val="F6E2D5"/>
                       </a:solidFill>
                       <a:prstDash val="solid"/>
                     </a:lnL>
                     <a:lnR w="9525" cap="flat" cmpd="sng" algn="ctr">
                       <a:solidFill>
-                        <a:srgbClr val="EDDED4"/>
+                        <a:srgbClr val="F6E2D5"/>
                       </a:solidFill>
                       <a:prstDash val="solid"/>
                     </a:lnR>
                     <a:lnT w="9525" cap="flat" cmpd="sng" algn="ctr">
                       <a:solidFill>
-                        <a:srgbClr val="EDDED4"/>
+                        <a:srgbClr val="F6E2D5"/>
                       </a:solidFill>
                       <a:prstDash val="solid"/>
                     </a:lnT>
                     <a:lnB w="9525" cap="flat" cmpd="sng" algn="ctr">
                       <a:solidFill>
-                        <a:srgbClr val="EDDED4"/>
+                        <a:srgbClr val="F6E2D5"/>
                       </a:solidFill>
                       <a:prstDash val="solid"/>
                     </a:lnB>
@@ -4718,7 +4936,7 @@
                       <a:r>
                         <a:rPr sz="1400" b="0">
                           <a:solidFill>
-                            <a:srgbClr val="2B2B2B"/>
+                            <a:srgbClr val="26231F"/>
                           </a:solidFill>
                         </a:rPr>
                         <a:t/>
@@ -4728,25 +4946,25 @@
                   <a:tcPr anchor="ctr" marL="73152" marR="73152">
                     <a:lnL w="9525" cap="flat" cmpd="sng" algn="ctr">
                       <a:solidFill>
-                        <a:srgbClr val="EDDED4"/>
+                        <a:srgbClr val="F6E2D5"/>
                       </a:solidFill>
                       <a:prstDash val="solid"/>
                     </a:lnL>
                     <a:lnR w="9525" cap="flat" cmpd="sng" algn="ctr">
                       <a:solidFill>
-                        <a:srgbClr val="EDDED4"/>
+                        <a:srgbClr val="F6E2D5"/>
                       </a:solidFill>
                       <a:prstDash val="solid"/>
                     </a:lnR>
                     <a:lnT w="9525" cap="flat" cmpd="sng" algn="ctr">
                       <a:solidFill>
-                        <a:srgbClr val="EDDED4"/>
+                        <a:srgbClr val="F6E2D5"/>
                       </a:solidFill>
                       <a:prstDash val="solid"/>
                     </a:lnT>
                     <a:lnB w="9525" cap="flat" cmpd="sng" algn="ctr">
                       <a:solidFill>
-                        <a:srgbClr val="EDDED4"/>
+                        <a:srgbClr val="F6E2D5"/>
                       </a:solidFill>
                       <a:prstDash val="solid"/>
                     </a:lnB>
@@ -4764,7 +4982,7 @@
                       <a:r>
                         <a:rPr sz="1400" b="0">
                           <a:solidFill>
-                            <a:srgbClr val="2B2B2B"/>
+                            <a:srgbClr val="26231F"/>
                           </a:solidFill>
                         </a:rPr>
                         <a:t/>
@@ -4774,25 +4992,25 @@
                   <a:tcPr anchor="ctr" marL="73152" marR="73152">
                     <a:lnL w="9525" cap="flat" cmpd="sng" algn="ctr">
                       <a:solidFill>
-                        <a:srgbClr val="EDDED4"/>
+                        <a:srgbClr val="F6E2D5"/>
                       </a:solidFill>
                       <a:prstDash val="solid"/>
                     </a:lnL>
                     <a:lnR w="9525" cap="flat" cmpd="sng" algn="ctr">
                       <a:solidFill>
-                        <a:srgbClr val="EDDED4"/>
+                        <a:srgbClr val="F6E2D5"/>
                       </a:solidFill>
                       <a:prstDash val="solid"/>
                     </a:lnR>
                     <a:lnT w="9525" cap="flat" cmpd="sng" algn="ctr">
                       <a:solidFill>
-                        <a:srgbClr val="EDDED4"/>
+                        <a:srgbClr val="F6E2D5"/>
                       </a:solidFill>
                       <a:prstDash val="solid"/>
                     </a:lnT>
                     <a:lnB w="9525" cap="flat" cmpd="sng" algn="ctr">
                       <a:solidFill>
-                        <a:srgbClr val="EDDED4"/>
+                        <a:srgbClr val="F6E2D5"/>
                       </a:solidFill>
                       <a:prstDash val="solid"/>
                     </a:lnB>
@@ -4810,7 +5028,7 @@
                       <a:r>
                         <a:rPr sz="1400" b="0">
                           <a:solidFill>
-                            <a:srgbClr val="2B2B2B"/>
+                            <a:srgbClr val="26231F"/>
                           </a:solidFill>
                         </a:rPr>
                         <a:t/>
@@ -4820,25 +5038,25 @@
                   <a:tcPr anchor="ctr" marL="73152" marR="73152">
                     <a:lnL w="9525" cap="flat" cmpd="sng" algn="ctr">
                       <a:solidFill>
-                        <a:srgbClr val="EDDED4"/>
+                        <a:srgbClr val="F6E2D5"/>
                       </a:solidFill>
                       <a:prstDash val="solid"/>
                     </a:lnL>
                     <a:lnR w="9525" cap="flat" cmpd="sng" algn="ctr">
                       <a:solidFill>
-                        <a:srgbClr val="EDDED4"/>
+                        <a:srgbClr val="F6E2D5"/>
                       </a:solidFill>
                       <a:prstDash val="solid"/>
                     </a:lnR>
                     <a:lnT w="9525" cap="flat" cmpd="sng" algn="ctr">
                       <a:solidFill>
-                        <a:srgbClr val="EDDED4"/>
+                        <a:srgbClr val="F6E2D5"/>
                       </a:solidFill>
                       <a:prstDash val="solid"/>
                     </a:lnT>
                     <a:lnB w="9525" cap="flat" cmpd="sng" algn="ctr">
                       <a:solidFill>
-                        <a:srgbClr val="EDDED4"/>
+                        <a:srgbClr val="F6E2D5"/>
                       </a:solidFill>
                       <a:prstDash val="solid"/>
                     </a:lnB>
@@ -4858,7 +5076,7 @@
                       <a:r>
                         <a:rPr sz="1400" b="0">
                           <a:solidFill>
-                            <a:srgbClr val="2B2B2B"/>
+                            <a:srgbClr val="26231F"/>
                           </a:solidFill>
                         </a:rPr>
                         <a:t/>
@@ -4868,30 +5086,30 @@
                   <a:tcPr anchor="ctr" marL="73152" marR="73152">
                     <a:lnL w="9525" cap="flat" cmpd="sng" algn="ctr">
                       <a:solidFill>
-                        <a:srgbClr val="EDDED4"/>
+                        <a:srgbClr val="F6E2D5"/>
                       </a:solidFill>
                       <a:prstDash val="solid"/>
                     </a:lnL>
                     <a:lnR w="9525" cap="flat" cmpd="sng" algn="ctr">
                       <a:solidFill>
-                        <a:srgbClr val="EDDED4"/>
+                        <a:srgbClr val="F6E2D5"/>
                       </a:solidFill>
                       <a:prstDash val="solid"/>
                     </a:lnR>
                     <a:lnT w="9525" cap="flat" cmpd="sng" algn="ctr">
                       <a:solidFill>
-                        <a:srgbClr val="EDDED4"/>
+                        <a:srgbClr val="F6E2D5"/>
                       </a:solidFill>
                       <a:prstDash val="solid"/>
                     </a:lnT>
                     <a:lnB w="9525" cap="flat" cmpd="sng" algn="ctr">
                       <a:solidFill>
-                        <a:srgbClr val="EDDED4"/>
+                        <a:srgbClr val="F6E2D5"/>
                       </a:solidFill>
                       <a:prstDash val="solid"/>
                     </a:lnB>
                     <a:solidFill>
-                      <a:srgbClr val="F8F4F1"/>
+                      <a:srgbClr val="FBF2EC"/>
                     </a:solidFill>
                   </a:tcPr>
                 </a:tc>
@@ -4904,7 +5122,7 @@
                       <a:r>
                         <a:rPr sz="1400" b="0">
                           <a:solidFill>
-                            <a:srgbClr val="2B2B2B"/>
+                            <a:srgbClr val="26231F"/>
                           </a:solidFill>
                         </a:rPr>
                         <a:t/>
@@ -4914,30 +5132,30 @@
                   <a:tcPr anchor="ctr" marL="73152" marR="73152">
                     <a:lnL w="9525" cap="flat" cmpd="sng" algn="ctr">
                       <a:solidFill>
-                        <a:srgbClr val="EDDED4"/>
+                        <a:srgbClr val="F6E2D5"/>
                       </a:solidFill>
                       <a:prstDash val="solid"/>
                     </a:lnL>
                     <a:lnR w="9525" cap="flat" cmpd="sng" algn="ctr">
                       <a:solidFill>
-                        <a:srgbClr val="EDDED4"/>
+                        <a:srgbClr val="F6E2D5"/>
                       </a:solidFill>
                       <a:prstDash val="solid"/>
                     </a:lnR>
                     <a:lnT w="9525" cap="flat" cmpd="sng" algn="ctr">
                       <a:solidFill>
-                        <a:srgbClr val="EDDED4"/>
+                        <a:srgbClr val="F6E2D5"/>
                       </a:solidFill>
                       <a:prstDash val="solid"/>
                     </a:lnT>
                     <a:lnB w="9525" cap="flat" cmpd="sng" algn="ctr">
                       <a:solidFill>
-                        <a:srgbClr val="EDDED4"/>
+                        <a:srgbClr val="F6E2D5"/>
                       </a:solidFill>
                       <a:prstDash val="solid"/>
                     </a:lnB>
                     <a:solidFill>
-                      <a:srgbClr val="F8F4F1"/>
+                      <a:srgbClr val="FBF2EC"/>
                     </a:solidFill>
                   </a:tcPr>
                 </a:tc>
@@ -4950,7 +5168,7 @@
                       <a:r>
                         <a:rPr sz="1400" b="0">
                           <a:solidFill>
-                            <a:srgbClr val="2B2B2B"/>
+                            <a:srgbClr val="26231F"/>
                           </a:solidFill>
                         </a:rPr>
                         <a:t/>
@@ -4960,30 +5178,30 @@
                   <a:tcPr anchor="ctr" marL="73152" marR="73152">
                     <a:lnL w="9525" cap="flat" cmpd="sng" algn="ctr">
                       <a:solidFill>
-                        <a:srgbClr val="EDDED4"/>
+                        <a:srgbClr val="F6E2D5"/>
                       </a:solidFill>
                       <a:prstDash val="solid"/>
                     </a:lnL>
                     <a:lnR w="9525" cap="flat" cmpd="sng" algn="ctr">
                       <a:solidFill>
-                        <a:srgbClr val="EDDED4"/>
+                        <a:srgbClr val="F6E2D5"/>
                       </a:solidFill>
                       <a:prstDash val="solid"/>
                     </a:lnR>
                     <a:lnT w="9525" cap="flat" cmpd="sng" algn="ctr">
                       <a:solidFill>
-                        <a:srgbClr val="EDDED4"/>
+                        <a:srgbClr val="F6E2D5"/>
                       </a:solidFill>
                       <a:prstDash val="solid"/>
                     </a:lnT>
                     <a:lnB w="9525" cap="flat" cmpd="sng" algn="ctr">
                       <a:solidFill>
-                        <a:srgbClr val="EDDED4"/>
+                        <a:srgbClr val="F6E2D5"/>
                       </a:solidFill>
                       <a:prstDash val="solid"/>
                     </a:lnB>
                     <a:solidFill>
-                      <a:srgbClr val="F8F4F1"/>
+                      <a:srgbClr val="FBF2EC"/>
                     </a:solidFill>
                   </a:tcPr>
                 </a:tc>
@@ -4996,7 +5214,7 @@
                       <a:r>
                         <a:rPr sz="1400" b="0">
                           <a:solidFill>
-                            <a:srgbClr val="2B2B2B"/>
+                            <a:srgbClr val="26231F"/>
                           </a:solidFill>
                         </a:rPr>
                         <a:t/>
@@ -5006,30 +5224,30 @@
                   <a:tcPr anchor="ctr" marL="73152" marR="73152">
                     <a:lnL w="9525" cap="flat" cmpd="sng" algn="ctr">
                       <a:solidFill>
-                        <a:srgbClr val="EDDED4"/>
+                        <a:srgbClr val="F6E2D5"/>
                       </a:solidFill>
                       <a:prstDash val="solid"/>
                     </a:lnL>
                     <a:lnR w="9525" cap="flat" cmpd="sng" algn="ctr">
                       <a:solidFill>
-                        <a:srgbClr val="EDDED4"/>
+                        <a:srgbClr val="F6E2D5"/>
                       </a:solidFill>
                       <a:prstDash val="solid"/>
                     </a:lnR>
                     <a:lnT w="9525" cap="flat" cmpd="sng" algn="ctr">
                       <a:solidFill>
-                        <a:srgbClr val="EDDED4"/>
+                        <a:srgbClr val="F6E2D5"/>
                       </a:solidFill>
                       <a:prstDash val="solid"/>
                     </a:lnT>
                     <a:lnB w="9525" cap="flat" cmpd="sng" algn="ctr">
                       <a:solidFill>
-                        <a:srgbClr val="EDDED4"/>
+                        <a:srgbClr val="F6E2D5"/>
                       </a:solidFill>
                       <a:prstDash val="solid"/>
                     </a:lnB>
                     <a:solidFill>
-                      <a:srgbClr val="F8F4F1"/>
+                      <a:srgbClr val="FBF2EC"/>
                     </a:solidFill>
                   </a:tcPr>
                 </a:tc>
@@ -5042,7 +5260,7 @@
                       <a:r>
                         <a:rPr sz="1400" b="0">
                           <a:solidFill>
-                            <a:srgbClr val="2B2B2B"/>
+                            <a:srgbClr val="26231F"/>
                           </a:solidFill>
                         </a:rPr>
                         <a:t/>
@@ -5052,30 +5270,30 @@
                   <a:tcPr anchor="ctr" marL="73152" marR="73152">
                     <a:lnL w="9525" cap="flat" cmpd="sng" algn="ctr">
                       <a:solidFill>
-                        <a:srgbClr val="EDDED4"/>
+                        <a:srgbClr val="F6E2D5"/>
                       </a:solidFill>
                       <a:prstDash val="solid"/>
                     </a:lnL>
                     <a:lnR w="9525" cap="flat" cmpd="sng" algn="ctr">
                       <a:solidFill>
-                        <a:srgbClr val="EDDED4"/>
+                        <a:srgbClr val="F6E2D5"/>
                       </a:solidFill>
                       <a:prstDash val="solid"/>
                     </a:lnR>
                     <a:lnT w="9525" cap="flat" cmpd="sng" algn="ctr">
                       <a:solidFill>
-                        <a:srgbClr val="EDDED4"/>
+                        <a:srgbClr val="F6E2D5"/>
                       </a:solidFill>
                       <a:prstDash val="solid"/>
                     </a:lnT>
                     <a:lnB w="9525" cap="flat" cmpd="sng" algn="ctr">
                       <a:solidFill>
-                        <a:srgbClr val="EDDED4"/>
+                        <a:srgbClr val="F6E2D5"/>
                       </a:solidFill>
                       <a:prstDash val="solid"/>
                     </a:lnB>
                     <a:solidFill>
-                      <a:srgbClr val="F8F4F1"/>
+                      <a:srgbClr val="FBF2EC"/>
                     </a:solidFill>
                   </a:tcPr>
                 </a:tc>
@@ -5090,7 +5308,7 @@
                       <a:r>
                         <a:rPr sz="1400" b="0">
                           <a:solidFill>
-                            <a:srgbClr val="2B2B2B"/>
+                            <a:srgbClr val="26231F"/>
                           </a:solidFill>
                         </a:rPr>
                         <a:t/>
@@ -5100,25 +5318,25 @@
                   <a:tcPr anchor="ctr" marL="73152" marR="73152">
                     <a:lnL w="9525" cap="flat" cmpd="sng" algn="ctr">
                       <a:solidFill>
-                        <a:srgbClr val="EDDED4"/>
+                        <a:srgbClr val="F6E2D5"/>
                       </a:solidFill>
                       <a:prstDash val="solid"/>
                     </a:lnL>
                     <a:lnR w="9525" cap="flat" cmpd="sng" algn="ctr">
                       <a:solidFill>
-                        <a:srgbClr val="EDDED4"/>
+                        <a:srgbClr val="F6E2D5"/>
                       </a:solidFill>
                       <a:prstDash val="solid"/>
                     </a:lnR>
                     <a:lnT w="9525" cap="flat" cmpd="sng" algn="ctr">
                       <a:solidFill>
-                        <a:srgbClr val="EDDED4"/>
+                        <a:srgbClr val="F6E2D5"/>
                       </a:solidFill>
                       <a:prstDash val="solid"/>
                     </a:lnT>
                     <a:lnB w="9525" cap="flat" cmpd="sng" algn="ctr">
                       <a:solidFill>
-                        <a:srgbClr val="EDDED4"/>
+                        <a:srgbClr val="F6E2D5"/>
                       </a:solidFill>
                       <a:prstDash val="solid"/>
                     </a:lnB>
@@ -5136,7 +5354,7 @@
                       <a:r>
                         <a:rPr sz="1400" b="0">
                           <a:solidFill>
-                            <a:srgbClr val="2B2B2B"/>
+                            <a:srgbClr val="26231F"/>
                           </a:solidFill>
                         </a:rPr>
                         <a:t/>
@@ -5146,25 +5364,25 @@
                   <a:tcPr anchor="ctr" marL="73152" marR="73152">
                     <a:lnL w="9525" cap="flat" cmpd="sng" algn="ctr">
                       <a:solidFill>
-                        <a:srgbClr val="EDDED4"/>
+                        <a:srgbClr val="F6E2D5"/>
                       </a:solidFill>
                       <a:prstDash val="solid"/>
                     </a:lnL>
                     <a:lnR w="9525" cap="flat" cmpd="sng" algn="ctr">
                       <a:solidFill>
-                        <a:srgbClr val="EDDED4"/>
+                        <a:srgbClr val="F6E2D5"/>
                       </a:solidFill>
                       <a:prstDash val="solid"/>
                     </a:lnR>
                     <a:lnT w="9525" cap="flat" cmpd="sng" algn="ctr">
                       <a:solidFill>
-                        <a:srgbClr val="EDDED4"/>
+                        <a:srgbClr val="F6E2D5"/>
                       </a:solidFill>
                       <a:prstDash val="solid"/>
                     </a:lnT>
                     <a:lnB w="9525" cap="flat" cmpd="sng" algn="ctr">
                       <a:solidFill>
-                        <a:srgbClr val="EDDED4"/>
+                        <a:srgbClr val="F6E2D5"/>
                       </a:solidFill>
                       <a:prstDash val="solid"/>
                     </a:lnB>
@@ -5182,7 +5400,7 @@
                       <a:r>
                         <a:rPr sz="1400" b="0">
                           <a:solidFill>
-                            <a:srgbClr val="2B2B2B"/>
+                            <a:srgbClr val="26231F"/>
                           </a:solidFill>
                         </a:rPr>
                         <a:t/>
@@ -5192,25 +5410,25 @@
                   <a:tcPr anchor="ctr" marL="73152" marR="73152">
                     <a:lnL w="9525" cap="flat" cmpd="sng" algn="ctr">
                       <a:solidFill>
-                        <a:srgbClr val="EDDED4"/>
+                        <a:srgbClr val="F6E2D5"/>
                       </a:solidFill>
                       <a:prstDash val="solid"/>
                     </a:lnL>
                     <a:lnR w="9525" cap="flat" cmpd="sng" algn="ctr">
                       <a:solidFill>
-                        <a:srgbClr val="EDDED4"/>
+                        <a:srgbClr val="F6E2D5"/>
                       </a:solidFill>
                       <a:prstDash val="solid"/>
                     </a:lnR>
                     <a:lnT w="9525" cap="flat" cmpd="sng" algn="ctr">
                       <a:solidFill>
-                        <a:srgbClr val="EDDED4"/>
+                        <a:srgbClr val="F6E2D5"/>
                       </a:solidFill>
                       <a:prstDash val="solid"/>
                     </a:lnT>
                     <a:lnB w="9525" cap="flat" cmpd="sng" algn="ctr">
                       <a:solidFill>
-                        <a:srgbClr val="EDDED4"/>
+                        <a:srgbClr val="F6E2D5"/>
                       </a:solidFill>
                       <a:prstDash val="solid"/>
                     </a:lnB>
@@ -5228,7 +5446,7 @@
                       <a:r>
                         <a:rPr sz="1400" b="0">
                           <a:solidFill>
-                            <a:srgbClr val="2B2B2B"/>
+                            <a:srgbClr val="26231F"/>
                           </a:solidFill>
                         </a:rPr>
                         <a:t/>
@@ -5238,25 +5456,25 @@
                   <a:tcPr anchor="ctr" marL="73152" marR="73152">
                     <a:lnL w="9525" cap="flat" cmpd="sng" algn="ctr">
                       <a:solidFill>
-                        <a:srgbClr val="EDDED4"/>
+                        <a:srgbClr val="F6E2D5"/>
                       </a:solidFill>
                       <a:prstDash val="solid"/>
                     </a:lnL>
                     <a:lnR w="9525" cap="flat" cmpd="sng" algn="ctr">
                       <a:solidFill>
-                        <a:srgbClr val="EDDED4"/>
+                        <a:srgbClr val="F6E2D5"/>
                       </a:solidFill>
                       <a:prstDash val="solid"/>
                     </a:lnR>
                     <a:lnT w="9525" cap="flat" cmpd="sng" algn="ctr">
                       <a:solidFill>
-                        <a:srgbClr val="EDDED4"/>
+                        <a:srgbClr val="F6E2D5"/>
                       </a:solidFill>
                       <a:prstDash val="solid"/>
                     </a:lnT>
                     <a:lnB w="9525" cap="flat" cmpd="sng" algn="ctr">
                       <a:solidFill>
-                        <a:srgbClr val="EDDED4"/>
+                        <a:srgbClr val="F6E2D5"/>
                       </a:solidFill>
                       <a:prstDash val="solid"/>
                     </a:lnB>
@@ -5274,7 +5492,7 @@
                       <a:r>
                         <a:rPr sz="1400" b="0">
                           <a:solidFill>
-                            <a:srgbClr val="2B2B2B"/>
+                            <a:srgbClr val="26231F"/>
                           </a:solidFill>
                         </a:rPr>
                         <a:t/>
@@ -5284,25 +5502,25 @@
                   <a:tcPr anchor="ctr" marL="73152" marR="73152">
                     <a:lnL w="9525" cap="flat" cmpd="sng" algn="ctr">
                       <a:solidFill>
-                        <a:srgbClr val="EDDED4"/>
+                        <a:srgbClr val="F6E2D5"/>
                       </a:solidFill>
                       <a:prstDash val="solid"/>
                     </a:lnL>
                     <a:lnR w="9525" cap="flat" cmpd="sng" algn="ctr">
                       <a:solidFill>
-                        <a:srgbClr val="EDDED4"/>
+                        <a:srgbClr val="F6E2D5"/>
                       </a:solidFill>
                       <a:prstDash val="solid"/>
                     </a:lnR>
                     <a:lnT w="9525" cap="flat" cmpd="sng" algn="ctr">
                       <a:solidFill>
-                        <a:srgbClr val="EDDED4"/>
+                        <a:srgbClr val="F6E2D5"/>
                       </a:solidFill>
                       <a:prstDash val="solid"/>
                     </a:lnT>
                     <a:lnB w="9525" cap="flat" cmpd="sng" algn="ctr">
                       <a:solidFill>
-                        <a:srgbClr val="EDDED4"/>
+                        <a:srgbClr val="F6E2D5"/>
                       </a:solidFill>
                       <a:prstDash val="solid"/>
                     </a:lnB>
@@ -5322,7 +5540,7 @@
                       <a:r>
                         <a:rPr sz="1400" b="0">
                           <a:solidFill>
-                            <a:srgbClr val="2B2B2B"/>
+                            <a:srgbClr val="26231F"/>
                           </a:solidFill>
                         </a:rPr>
                         <a:t/>
@@ -5332,30 +5550,30 @@
                   <a:tcPr anchor="ctr" marL="73152" marR="73152">
                     <a:lnL w="9525" cap="flat" cmpd="sng" algn="ctr">
                       <a:solidFill>
-                        <a:srgbClr val="EDDED4"/>
+                        <a:srgbClr val="F6E2D5"/>
                       </a:solidFill>
                       <a:prstDash val="solid"/>
                     </a:lnL>
                     <a:lnR w="9525" cap="flat" cmpd="sng" algn="ctr">
                       <a:solidFill>
-                        <a:srgbClr val="EDDED4"/>
+                        <a:srgbClr val="F6E2D5"/>
                       </a:solidFill>
                       <a:prstDash val="solid"/>
                     </a:lnR>
                     <a:lnT w="9525" cap="flat" cmpd="sng" algn="ctr">
                       <a:solidFill>
-                        <a:srgbClr val="EDDED4"/>
+                        <a:srgbClr val="F6E2D5"/>
                       </a:solidFill>
                       <a:prstDash val="solid"/>
                     </a:lnT>
                     <a:lnB w="9525" cap="flat" cmpd="sng" algn="ctr">
                       <a:solidFill>
-                        <a:srgbClr val="EDDED4"/>
+                        <a:srgbClr val="F6E2D5"/>
                       </a:solidFill>
                       <a:prstDash val="solid"/>
                     </a:lnB>
                     <a:solidFill>
-                      <a:srgbClr val="F8F4F1"/>
+                      <a:srgbClr val="FBF2EC"/>
                     </a:solidFill>
                   </a:tcPr>
                 </a:tc>
@@ -5368,7 +5586,7 @@
                       <a:r>
                         <a:rPr sz="1400" b="0">
                           <a:solidFill>
-                            <a:srgbClr val="2B2B2B"/>
+                            <a:srgbClr val="26231F"/>
                           </a:solidFill>
                         </a:rPr>
                         <a:t/>
@@ -5378,30 +5596,30 @@
                   <a:tcPr anchor="ctr" marL="73152" marR="73152">
                     <a:lnL w="9525" cap="flat" cmpd="sng" algn="ctr">
                       <a:solidFill>
-                        <a:srgbClr val="EDDED4"/>
+                        <a:srgbClr val="F6E2D5"/>
                       </a:solidFill>
                       <a:prstDash val="solid"/>
                     </a:lnL>
                     <a:lnR w="9525" cap="flat" cmpd="sng" algn="ctr">
                       <a:solidFill>
-                        <a:srgbClr val="EDDED4"/>
+                        <a:srgbClr val="F6E2D5"/>
                       </a:solidFill>
                       <a:prstDash val="solid"/>
                     </a:lnR>
                     <a:lnT w="9525" cap="flat" cmpd="sng" algn="ctr">
                       <a:solidFill>
-                        <a:srgbClr val="EDDED4"/>
+                        <a:srgbClr val="F6E2D5"/>
                       </a:solidFill>
                       <a:prstDash val="solid"/>
                     </a:lnT>
                     <a:lnB w="9525" cap="flat" cmpd="sng" algn="ctr">
                       <a:solidFill>
-                        <a:srgbClr val="EDDED4"/>
+                        <a:srgbClr val="F6E2D5"/>
                       </a:solidFill>
                       <a:prstDash val="solid"/>
                     </a:lnB>
                     <a:solidFill>
-                      <a:srgbClr val="F8F4F1"/>
+                      <a:srgbClr val="FBF2EC"/>
                     </a:solidFill>
                   </a:tcPr>
                 </a:tc>
@@ -5414,7 +5632,7 @@
                       <a:r>
                         <a:rPr sz="1400" b="0">
                           <a:solidFill>
-                            <a:srgbClr val="2B2B2B"/>
+                            <a:srgbClr val="26231F"/>
                           </a:solidFill>
                         </a:rPr>
                         <a:t/>
@@ -5424,30 +5642,30 @@
                   <a:tcPr anchor="ctr" marL="73152" marR="73152">
                     <a:lnL w="9525" cap="flat" cmpd="sng" algn="ctr">
                       <a:solidFill>
-                        <a:srgbClr val="EDDED4"/>
+                        <a:srgbClr val="F6E2D5"/>
                       </a:solidFill>
                       <a:prstDash val="solid"/>
                     </a:lnL>
                     <a:lnR w="9525" cap="flat" cmpd="sng" algn="ctr">
                       <a:solidFill>
-                        <a:srgbClr val="EDDED4"/>
+                        <a:srgbClr val="F6E2D5"/>
                       </a:solidFill>
                       <a:prstDash val="solid"/>
                     </a:lnR>
                     <a:lnT w="9525" cap="flat" cmpd="sng" algn="ctr">
                       <a:solidFill>
-                        <a:srgbClr val="EDDED4"/>
+                        <a:srgbClr val="F6E2D5"/>
                       </a:solidFill>
                       <a:prstDash val="solid"/>
                     </a:lnT>
                     <a:lnB w="9525" cap="flat" cmpd="sng" algn="ctr">
                       <a:solidFill>
-                        <a:srgbClr val="EDDED4"/>
+                        <a:srgbClr val="F6E2D5"/>
                       </a:solidFill>
                       <a:prstDash val="solid"/>
                     </a:lnB>
                     <a:solidFill>
-                      <a:srgbClr val="F8F4F1"/>
+                      <a:srgbClr val="FBF2EC"/>
                     </a:solidFill>
                   </a:tcPr>
                 </a:tc>
@@ -5460,7 +5678,7 @@
                       <a:r>
                         <a:rPr sz="1400" b="0">
                           <a:solidFill>
-                            <a:srgbClr val="2B2B2B"/>
+                            <a:srgbClr val="26231F"/>
                           </a:solidFill>
                         </a:rPr>
                         <a:t/>
@@ -5470,30 +5688,30 @@
                   <a:tcPr anchor="ctr" marL="73152" marR="73152">
                     <a:lnL w="9525" cap="flat" cmpd="sng" algn="ctr">
                       <a:solidFill>
-                        <a:srgbClr val="EDDED4"/>
+                        <a:srgbClr val="F6E2D5"/>
                       </a:solidFill>
                       <a:prstDash val="solid"/>
                     </a:lnL>
                     <a:lnR w="9525" cap="flat" cmpd="sng" algn="ctr">
                       <a:solidFill>
-                        <a:srgbClr val="EDDED4"/>
+                        <a:srgbClr val="F6E2D5"/>
                       </a:solidFill>
                       <a:prstDash val="solid"/>
                     </a:lnR>
                     <a:lnT w="9525" cap="flat" cmpd="sng" algn="ctr">
                       <a:solidFill>
-                        <a:srgbClr val="EDDED4"/>
+                        <a:srgbClr val="F6E2D5"/>
                       </a:solidFill>
                       <a:prstDash val="solid"/>
                     </a:lnT>
                     <a:lnB w="9525" cap="flat" cmpd="sng" algn="ctr">
                       <a:solidFill>
-                        <a:srgbClr val="EDDED4"/>
+                        <a:srgbClr val="F6E2D5"/>
                       </a:solidFill>
                       <a:prstDash val="solid"/>
                     </a:lnB>
                     <a:solidFill>
-                      <a:srgbClr val="F8F4F1"/>
+                      <a:srgbClr val="FBF2EC"/>
                     </a:solidFill>
                   </a:tcPr>
                 </a:tc>
@@ -5506,7 +5724,7 @@
                       <a:r>
                         <a:rPr sz="1400" b="0">
                           <a:solidFill>
-                            <a:srgbClr val="2B2B2B"/>
+                            <a:srgbClr val="26231F"/>
                           </a:solidFill>
                         </a:rPr>
                         <a:t/>
@@ -5516,30 +5734,30 @@
                   <a:tcPr anchor="ctr" marL="73152" marR="73152">
                     <a:lnL w="9525" cap="flat" cmpd="sng" algn="ctr">
                       <a:solidFill>
-                        <a:srgbClr val="EDDED4"/>
+                        <a:srgbClr val="F6E2D5"/>
                       </a:solidFill>
                       <a:prstDash val="solid"/>
                     </a:lnL>
                     <a:lnR w="9525" cap="flat" cmpd="sng" algn="ctr">
                       <a:solidFill>
-                        <a:srgbClr val="EDDED4"/>
+                        <a:srgbClr val="F6E2D5"/>
                       </a:solidFill>
                       <a:prstDash val="solid"/>
                     </a:lnR>
                     <a:lnT w="9525" cap="flat" cmpd="sng" algn="ctr">
                       <a:solidFill>
-                        <a:srgbClr val="EDDED4"/>
+                        <a:srgbClr val="F6E2D5"/>
                       </a:solidFill>
                       <a:prstDash val="solid"/>
                     </a:lnT>
                     <a:lnB w="9525" cap="flat" cmpd="sng" algn="ctr">
                       <a:solidFill>
-                        <a:srgbClr val="EDDED4"/>
+                        <a:srgbClr val="F6E2D5"/>
                       </a:solidFill>
                       <a:prstDash val="solid"/>
                     </a:lnB>
                     <a:solidFill>
-                      <a:srgbClr val="F8F4F1"/>
+                      <a:srgbClr val="FBF2EC"/>
                     </a:solidFill>
                   </a:tcPr>
                 </a:tc>
@@ -5554,7 +5772,7 @@
                       <a:r>
                         <a:rPr sz="1400" b="0">
                           <a:solidFill>
-                            <a:srgbClr val="2B2B2B"/>
+                            <a:srgbClr val="26231F"/>
                           </a:solidFill>
                         </a:rPr>
                         <a:t/>
@@ -5564,25 +5782,25 @@
                   <a:tcPr anchor="ctr" marL="73152" marR="73152">
                     <a:lnL w="9525" cap="flat" cmpd="sng" algn="ctr">
                       <a:solidFill>
-                        <a:srgbClr val="EDDED4"/>
+                        <a:srgbClr val="F6E2D5"/>
                       </a:solidFill>
                       <a:prstDash val="solid"/>
                     </a:lnL>
                     <a:lnR w="9525" cap="flat" cmpd="sng" algn="ctr">
                       <a:solidFill>
-                        <a:srgbClr val="EDDED4"/>
+                        <a:srgbClr val="F6E2D5"/>
                       </a:solidFill>
                       <a:prstDash val="solid"/>
                     </a:lnR>
                     <a:lnT w="9525" cap="flat" cmpd="sng" algn="ctr">
                       <a:solidFill>
-                        <a:srgbClr val="EDDED4"/>
+                        <a:srgbClr val="F6E2D5"/>
                       </a:solidFill>
                       <a:prstDash val="solid"/>
                     </a:lnT>
                     <a:lnB w="9525" cap="flat" cmpd="sng" algn="ctr">
                       <a:solidFill>
-                        <a:srgbClr val="EDDED4"/>
+                        <a:srgbClr val="F6E2D5"/>
                       </a:solidFill>
                       <a:prstDash val="solid"/>
                     </a:lnB>
@@ -5600,7 +5818,7 @@
                       <a:r>
                         <a:rPr sz="1400" b="0">
                           <a:solidFill>
-                            <a:srgbClr val="2B2B2B"/>
+                            <a:srgbClr val="26231F"/>
                           </a:solidFill>
                         </a:rPr>
                         <a:t/>
@@ -5610,25 +5828,25 @@
                   <a:tcPr anchor="ctr" marL="73152" marR="73152">
                     <a:lnL w="9525" cap="flat" cmpd="sng" algn="ctr">
                       <a:solidFill>
-                        <a:srgbClr val="EDDED4"/>
+                        <a:srgbClr val="F6E2D5"/>
                       </a:solidFill>
                       <a:prstDash val="solid"/>
                     </a:lnL>
                     <a:lnR w="9525" cap="flat" cmpd="sng" algn="ctr">
                       <a:solidFill>
-                        <a:srgbClr val="EDDED4"/>
+                        <a:srgbClr val="F6E2D5"/>
                       </a:solidFill>
                       <a:prstDash val="solid"/>
                     </a:lnR>
                     <a:lnT w="9525" cap="flat" cmpd="sng" algn="ctr">
                       <a:solidFill>
-                        <a:srgbClr val="EDDED4"/>
+                        <a:srgbClr val="F6E2D5"/>
                       </a:solidFill>
                       <a:prstDash val="solid"/>
                     </a:lnT>
                     <a:lnB w="9525" cap="flat" cmpd="sng" algn="ctr">
                       <a:solidFill>
-                        <a:srgbClr val="EDDED4"/>
+                        <a:srgbClr val="F6E2D5"/>
                       </a:solidFill>
                       <a:prstDash val="solid"/>
                     </a:lnB>
@@ -5646,7 +5864,7 @@
                       <a:r>
                         <a:rPr sz="1400" b="0">
                           <a:solidFill>
-                            <a:srgbClr val="2B2B2B"/>
+                            <a:srgbClr val="26231F"/>
                           </a:solidFill>
                         </a:rPr>
                         <a:t/>
@@ -5656,25 +5874,25 @@
                   <a:tcPr anchor="ctr" marL="73152" marR="73152">
                     <a:lnL w="9525" cap="flat" cmpd="sng" algn="ctr">
                       <a:solidFill>
-                        <a:srgbClr val="EDDED4"/>
+                        <a:srgbClr val="F6E2D5"/>
                       </a:solidFill>
                       <a:prstDash val="solid"/>
                     </a:lnL>
                     <a:lnR w="9525" cap="flat" cmpd="sng" algn="ctr">
                       <a:solidFill>
-                        <a:srgbClr val="EDDED4"/>
+                        <a:srgbClr val="F6E2D5"/>
                       </a:solidFill>
                       <a:prstDash val="solid"/>
                     </a:lnR>
                     <a:lnT w="9525" cap="flat" cmpd="sng" algn="ctr">
                       <a:solidFill>
-                        <a:srgbClr val="EDDED4"/>
+                        <a:srgbClr val="F6E2D5"/>
                       </a:solidFill>
                       <a:prstDash val="solid"/>
                     </a:lnT>
                     <a:lnB w="9525" cap="flat" cmpd="sng" algn="ctr">
                       <a:solidFill>
-                        <a:srgbClr val="EDDED4"/>
+                        <a:srgbClr val="F6E2D5"/>
                       </a:solidFill>
                       <a:prstDash val="solid"/>
                     </a:lnB>
@@ -5692,7 +5910,7 @@
                       <a:r>
                         <a:rPr sz="1400" b="0">
                           <a:solidFill>
-                            <a:srgbClr val="2B2B2B"/>
+                            <a:srgbClr val="26231F"/>
                           </a:solidFill>
                         </a:rPr>
                         <a:t/>
@@ -5702,25 +5920,25 @@
                   <a:tcPr anchor="ctr" marL="73152" marR="73152">
                     <a:lnL w="9525" cap="flat" cmpd="sng" algn="ctr">
                       <a:solidFill>
-                        <a:srgbClr val="EDDED4"/>
+                        <a:srgbClr val="F6E2D5"/>
                       </a:solidFill>
                       <a:prstDash val="solid"/>
                     </a:lnL>
                     <a:lnR w="9525" cap="flat" cmpd="sng" algn="ctr">
                       <a:solidFill>
-                        <a:srgbClr val="EDDED4"/>
+                        <a:srgbClr val="F6E2D5"/>
                       </a:solidFill>
                       <a:prstDash val="solid"/>
                     </a:lnR>
                     <a:lnT w="9525" cap="flat" cmpd="sng" algn="ctr">
                       <a:solidFill>
-                        <a:srgbClr val="EDDED4"/>
+                        <a:srgbClr val="F6E2D5"/>
                       </a:solidFill>
                       <a:prstDash val="solid"/>
                     </a:lnT>
                     <a:lnB w="9525" cap="flat" cmpd="sng" algn="ctr">
                       <a:solidFill>
-                        <a:srgbClr val="EDDED4"/>
+                        <a:srgbClr val="F6E2D5"/>
                       </a:solidFill>
                       <a:prstDash val="solid"/>
                     </a:lnB>
@@ -5738,7 +5956,7 @@
                       <a:r>
                         <a:rPr sz="1400" b="0">
                           <a:solidFill>
-                            <a:srgbClr val="2B2B2B"/>
+                            <a:srgbClr val="26231F"/>
                           </a:solidFill>
                         </a:rPr>
                         <a:t/>
@@ -5748,25 +5966,25 @@
                   <a:tcPr anchor="ctr" marL="73152" marR="73152">
                     <a:lnL w="9525" cap="flat" cmpd="sng" algn="ctr">
                       <a:solidFill>
-                        <a:srgbClr val="EDDED4"/>
+                        <a:srgbClr val="F6E2D5"/>
                       </a:solidFill>
                       <a:prstDash val="solid"/>
                     </a:lnL>
                     <a:lnR w="9525" cap="flat" cmpd="sng" algn="ctr">
                       <a:solidFill>
-                        <a:srgbClr val="EDDED4"/>
+                        <a:srgbClr val="F6E2D5"/>
                       </a:solidFill>
                       <a:prstDash val="solid"/>
                     </a:lnR>
                     <a:lnT w="9525" cap="flat" cmpd="sng" algn="ctr">
                       <a:solidFill>
-                        <a:srgbClr val="EDDED4"/>
+                        <a:srgbClr val="F6E2D5"/>
                       </a:solidFill>
                       <a:prstDash val="solid"/>
                     </a:lnT>
                     <a:lnB w="9525" cap="flat" cmpd="sng" algn="ctr">
                       <a:solidFill>
-                        <a:srgbClr val="EDDED4"/>
+                        <a:srgbClr val="F6E2D5"/>
                       </a:solidFill>
                       <a:prstDash val="solid"/>
                     </a:lnB>
@@ -5786,7 +6004,7 @@
                       <a:r>
                         <a:rPr sz="1400" b="0">
                           <a:solidFill>
-                            <a:srgbClr val="2B2B2B"/>
+                            <a:srgbClr val="26231F"/>
                           </a:solidFill>
                         </a:rPr>
                         <a:t/>
@@ -5796,30 +6014,30 @@
                   <a:tcPr anchor="ctr" marL="73152" marR="73152">
                     <a:lnL w="9525" cap="flat" cmpd="sng" algn="ctr">
                       <a:solidFill>
-                        <a:srgbClr val="EDDED4"/>
+                        <a:srgbClr val="F6E2D5"/>
                       </a:solidFill>
                       <a:prstDash val="solid"/>
                     </a:lnL>
                     <a:lnR w="9525" cap="flat" cmpd="sng" algn="ctr">
                       <a:solidFill>
-                        <a:srgbClr val="EDDED4"/>
+                        <a:srgbClr val="F6E2D5"/>
                       </a:solidFill>
                       <a:prstDash val="solid"/>
                     </a:lnR>
                     <a:lnT w="9525" cap="flat" cmpd="sng" algn="ctr">
                       <a:solidFill>
-                        <a:srgbClr val="EDDED4"/>
+                        <a:srgbClr val="F6E2D5"/>
                       </a:solidFill>
                       <a:prstDash val="solid"/>
                     </a:lnT>
                     <a:lnB w="9525" cap="flat" cmpd="sng" algn="ctr">
                       <a:solidFill>
-                        <a:srgbClr val="EDDED4"/>
+                        <a:srgbClr val="F6E2D5"/>
                       </a:solidFill>
                       <a:prstDash val="solid"/>
                     </a:lnB>
                     <a:solidFill>
-                      <a:srgbClr val="F8F4F1"/>
+                      <a:srgbClr val="FBF2EC"/>
                     </a:solidFill>
                   </a:tcPr>
                 </a:tc>
@@ -5832,7 +6050,7 @@
                       <a:r>
                         <a:rPr sz="1400" b="0">
                           <a:solidFill>
-                            <a:srgbClr val="2B2B2B"/>
+                            <a:srgbClr val="26231F"/>
                           </a:solidFill>
                         </a:rPr>
                         <a:t/>
@@ -5842,30 +6060,30 @@
                   <a:tcPr anchor="ctr" marL="73152" marR="73152">
                     <a:lnL w="9525" cap="flat" cmpd="sng" algn="ctr">
                       <a:solidFill>
-                        <a:srgbClr val="EDDED4"/>
+                        <a:srgbClr val="F6E2D5"/>
                       </a:solidFill>
                       <a:prstDash val="solid"/>
                     </a:lnL>
                     <a:lnR w="9525" cap="flat" cmpd="sng" algn="ctr">
                       <a:solidFill>
-                        <a:srgbClr val="EDDED4"/>
+                        <a:srgbClr val="F6E2D5"/>
                       </a:solidFill>
                       <a:prstDash val="solid"/>
                     </a:lnR>
                     <a:lnT w="9525" cap="flat" cmpd="sng" algn="ctr">
                       <a:solidFill>
-                        <a:srgbClr val="EDDED4"/>
+                        <a:srgbClr val="F6E2D5"/>
                       </a:solidFill>
                       <a:prstDash val="solid"/>
                     </a:lnT>
                     <a:lnB w="9525" cap="flat" cmpd="sng" algn="ctr">
                       <a:solidFill>
-                        <a:srgbClr val="EDDED4"/>
+                        <a:srgbClr val="F6E2D5"/>
                       </a:solidFill>
                       <a:prstDash val="solid"/>
                     </a:lnB>
                     <a:solidFill>
-                      <a:srgbClr val="F8F4F1"/>
+                      <a:srgbClr val="FBF2EC"/>
                     </a:solidFill>
                   </a:tcPr>
                 </a:tc>
@@ -5878,7 +6096,7 @@
                       <a:r>
                         <a:rPr sz="1400" b="0">
                           <a:solidFill>
-                            <a:srgbClr val="2B2B2B"/>
+                            <a:srgbClr val="26231F"/>
                           </a:solidFill>
                         </a:rPr>
                         <a:t/>
@@ -5888,30 +6106,30 @@
                   <a:tcPr anchor="ctr" marL="73152" marR="73152">
                     <a:lnL w="9525" cap="flat" cmpd="sng" algn="ctr">
                       <a:solidFill>
-                        <a:srgbClr val="EDDED4"/>
+                        <a:srgbClr val="F6E2D5"/>
                       </a:solidFill>
                       <a:prstDash val="solid"/>
                     </a:lnL>
                     <a:lnR w="9525" cap="flat" cmpd="sng" algn="ctr">
                       <a:solidFill>
-                        <a:srgbClr val="EDDED4"/>
+                        <a:srgbClr val="F6E2D5"/>
                       </a:solidFill>
                       <a:prstDash val="solid"/>
                     </a:lnR>
                     <a:lnT w="9525" cap="flat" cmpd="sng" algn="ctr">
                       <a:solidFill>
-                        <a:srgbClr val="EDDED4"/>
+                        <a:srgbClr val="F6E2D5"/>
                       </a:solidFill>
                       <a:prstDash val="solid"/>
                     </a:lnT>
                     <a:lnB w="9525" cap="flat" cmpd="sng" algn="ctr">
                       <a:solidFill>
-                        <a:srgbClr val="EDDED4"/>
+                        <a:srgbClr val="F6E2D5"/>
                       </a:solidFill>
                       <a:prstDash val="solid"/>
                     </a:lnB>
                     <a:solidFill>
-                      <a:srgbClr val="F8F4F1"/>
+                      <a:srgbClr val="FBF2EC"/>
                     </a:solidFill>
                   </a:tcPr>
                 </a:tc>
@@ -5924,7 +6142,7 @@
                       <a:r>
                         <a:rPr sz="1400" b="0">
                           <a:solidFill>
-                            <a:srgbClr val="2B2B2B"/>
+                            <a:srgbClr val="26231F"/>
                           </a:solidFill>
                         </a:rPr>
                         <a:t/>
@@ -5934,30 +6152,30 @@
                   <a:tcPr anchor="ctr" marL="73152" marR="73152">
                     <a:lnL w="9525" cap="flat" cmpd="sng" algn="ctr">
                       <a:solidFill>
-                        <a:srgbClr val="EDDED4"/>
+                        <a:srgbClr val="F6E2D5"/>
                       </a:solidFill>
                       <a:prstDash val="solid"/>
                     </a:lnL>
                     <a:lnR w="9525" cap="flat" cmpd="sng" algn="ctr">
                       <a:solidFill>
-                        <a:srgbClr val="EDDED4"/>
+                        <a:srgbClr val="F6E2D5"/>
                       </a:solidFill>
                       <a:prstDash val="solid"/>
                     </a:lnR>
                     <a:lnT w="9525" cap="flat" cmpd="sng" algn="ctr">
                       <a:solidFill>
-                        <a:srgbClr val="EDDED4"/>
+                        <a:srgbClr val="F6E2D5"/>
                       </a:solidFill>
                       <a:prstDash val="solid"/>
                     </a:lnT>
                     <a:lnB w="9525" cap="flat" cmpd="sng" algn="ctr">
                       <a:solidFill>
-                        <a:srgbClr val="EDDED4"/>
+                        <a:srgbClr val="F6E2D5"/>
                       </a:solidFill>
                       <a:prstDash val="solid"/>
                     </a:lnB>
                     <a:solidFill>
-                      <a:srgbClr val="F8F4F1"/>
+                      <a:srgbClr val="FBF2EC"/>
                     </a:solidFill>
                   </a:tcPr>
                 </a:tc>
@@ -5970,7 +6188,7 @@
                       <a:r>
                         <a:rPr sz="1400" b="0">
                           <a:solidFill>
-                            <a:srgbClr val="2B2B2B"/>
+                            <a:srgbClr val="26231F"/>
                           </a:solidFill>
                         </a:rPr>
                         <a:t/>
@@ -5980,30 +6198,30 @@
                   <a:tcPr anchor="ctr" marL="73152" marR="73152">
                     <a:lnL w="9525" cap="flat" cmpd="sng" algn="ctr">
                       <a:solidFill>
-                        <a:srgbClr val="EDDED4"/>
+                        <a:srgbClr val="F6E2D5"/>
                       </a:solidFill>
                       <a:prstDash val="solid"/>
                     </a:lnL>
                     <a:lnR w="9525" cap="flat" cmpd="sng" algn="ctr">
                       <a:solidFill>
-                        <a:srgbClr val="EDDED4"/>
+                        <a:srgbClr val="F6E2D5"/>
                       </a:solidFill>
                       <a:prstDash val="solid"/>
                     </a:lnR>
                     <a:lnT w="9525" cap="flat" cmpd="sng" algn="ctr">
                       <a:solidFill>
-                        <a:srgbClr val="EDDED4"/>
+                        <a:srgbClr val="F6E2D5"/>
                       </a:solidFill>
                       <a:prstDash val="solid"/>
                     </a:lnT>
                     <a:lnB w="9525" cap="flat" cmpd="sng" algn="ctr">
                       <a:solidFill>
-                        <a:srgbClr val="EDDED4"/>
+                        <a:srgbClr val="F6E2D5"/>
                       </a:solidFill>
                       <a:prstDash val="solid"/>
                     </a:lnB>
                     <a:solidFill>
-                      <a:srgbClr val="F8F4F1"/>
+                      <a:srgbClr val="FBF2EC"/>
                     </a:solidFill>
                   </a:tcPr>
                 </a:tc>
@@ -6026,7 +6244,7 @@
     <p:bg>
       <p:bgPr>
         <a:solidFill>
-          <a:srgbClr val="FFFFFF"/>
+          <a:srgbClr val="FBF2EC"/>
         </a:solidFill>
         <a:effectLst/>
       </p:bgPr>
@@ -6046,14 +6264,83 @@
         </p:nvSpPr>
         <p:spPr>
           <a:xfrm>
-            <a:off x="0" y="384048"/>
-            <a:ext cx="9509522" cy="896112"/>
-          </a:xfrm>
-          <a:prstGeom prst="homePlate">
+            <a:off x="640080" y="566928"/>
+            <a:ext cx="64008" cy="868680"/>
+          </a:xfrm>
+          <a:prstGeom prst="roundRect">
+            <a:avLst>
+              <a:gd name="adj" fmla="val 50000"/>
+            </a:avLst>
+          </a:prstGeom>
+          <a:solidFill>
+            <a:srgbClr val="D89F79"/>
+          </a:solidFill>
+          <a:ln>
+            <a:noFill/>
+          </a:ln>
+        </p:spPr>
+        <p:txBody>
+          <a:bodyPr rtlCol="0" anchor="ctr"/>
+          <a:lstStyle/>
+          <a:p>
+            <a:pPr algn="ctr"/>
+          </a:p>
+        </p:txBody>
+      </p:sp>
+      <p:sp>
+        <p:nvSpPr>
+          <p:cNvPr id="4" name="상단 라벨"/>
+          <p:cNvSpPr txBox="1"/>
+          <p:nvPr/>
+        </p:nvSpPr>
+        <p:spPr>
+          <a:xfrm>
+            <a:off x="868680" y="274320"/>
+            <a:ext cx="5486400" cy="274320"/>
+          </a:xfrm>
+          <a:prstGeom prst="rect">
+            <a:avLst/>
+          </a:prstGeom>
+          <a:noFill/>
+        </p:spPr>
+        <p:txBody>
+          <a:bodyPr wrap="square" lIns="54864" rIns="54864" tIns="27432" bIns="27432" anchor="ctr">
+            <a:noAutofit/>
+          </a:bodyPr>
+          <a:lstStyle/>
+          <a:p>
+            <a:pPr algn="l">
+              <a:lnSpc>
+                <a:spcPct val="115000"/>
+              </a:lnSpc>
+            </a:pPr>
+            <a:r>
+              <a:rPr sz="900" b="1" i="0" spc="250">
+                <a:solidFill>
+                  <a:srgbClr val="8E8780"/>
+                </a:solidFill>
+              </a:rPr>
+              <a:t>INSURANCE CHECK</a:t>
+            </a:r>
+          </a:p>
+        </p:txBody>
+      </p:sp>
+      <p:sp>
+        <p:nvSpPr>
+          <p:cNvPr id="5" name="포인트"/>
+          <p:cNvSpPr/>
+          <p:nvPr/>
+        </p:nvSpPr>
+        <p:spPr>
+          <a:xfrm>
+            <a:off x="11167567" y="667512"/>
+            <a:ext cx="310896" cy="310896"/>
+          </a:xfrm>
+          <a:prstGeom prst="moon">
             <a:avLst/>
           </a:prstGeom>
           <a:solidFill>
-            <a:srgbClr val="765037"/>
+            <a:srgbClr val="EBC6AD"/>
           </a:solidFill>
           <a:ln>
             <a:noFill/>
@@ -6079,8 +6366,8 @@
         </p:nvSpPr>
         <p:spPr>
           <a:xfrm>
-            <a:off x="640080" y="411480"/>
-            <a:ext cx="8412242" cy="822960"/>
+            <a:off x="868680" y="566928"/>
+            <a:ext cx="9448495" cy="868680"/>
           </a:xfrm>
         </p:spPr>
         <p:txBody>
@@ -6097,7 +6384,7 @@
             <a:r>
               <a:rPr sz="3000" b="1" i="0">
                 <a:solidFill>
-                  <a:srgbClr val="FFFFFF"/>
+                  <a:srgbClr val="26231F"/>
                 </a:solidFill>
               </a:rPr>
               <a:t>보장 항목 체크</a:t>
@@ -6107,14 +6394,14 @@
       </p:sp>
       <p:graphicFrame>
         <p:nvGraphicFramePr>
-          <p:cNvPr id="4" name="표"/>
+          <p:cNvPr id="6" name="표"/>
           <p:cNvGraphicFramePr>
             <a:graphicFrameLocks noGrp="1"/>
           </p:cNvGraphicFramePr>
           <p:nvPr/>
         </p:nvGraphicFramePr>
         <p:xfrm>
-          <a:off x="640080" y="1645920"/>
+          <a:off x="640080" y="1783080"/>
           <a:ext cx="10911534" cy="4773168"/>
         </p:xfrm>
         <a:graphic>
@@ -6139,7 +6426,7 @@
                       <a:r>
                         <a:rPr sz="1400" b="1">
                           <a:solidFill>
-                            <a:srgbClr val="FFFFFF"/>
+                            <a:srgbClr val="26231F"/>
                           </a:solidFill>
                         </a:rPr>
                         <a:t>보장 항목</a:t>
@@ -6149,30 +6436,30 @@
                   <a:tcPr anchor="ctr" marL="73152" marR="73152">
                     <a:lnL w="9525" cap="flat" cmpd="sng" algn="ctr">
                       <a:solidFill>
-                        <a:srgbClr val="765037"/>
+                        <a:srgbClr val="D89F79"/>
                       </a:solidFill>
                       <a:prstDash val="solid"/>
                     </a:lnL>
                     <a:lnR w="9525" cap="flat" cmpd="sng" algn="ctr">
                       <a:solidFill>
-                        <a:srgbClr val="765037"/>
+                        <a:srgbClr val="D89F79"/>
                       </a:solidFill>
                       <a:prstDash val="solid"/>
                     </a:lnR>
                     <a:lnT w="9525" cap="flat" cmpd="sng" algn="ctr">
                       <a:solidFill>
-                        <a:srgbClr val="765037"/>
+                        <a:srgbClr val="D89F79"/>
                       </a:solidFill>
                       <a:prstDash val="solid"/>
                     </a:lnT>
                     <a:lnB w="9525" cap="flat" cmpd="sng" algn="ctr">
                       <a:solidFill>
-                        <a:srgbClr val="765037"/>
+                        <a:srgbClr val="D89F79"/>
                       </a:solidFill>
                       <a:prstDash val="solid"/>
                     </a:lnB>
                     <a:solidFill>
-                      <a:srgbClr val="765037"/>
+                      <a:srgbClr val="D89F79"/>
                     </a:solidFill>
                   </a:tcPr>
                 </a:tc>
@@ -6185,7 +6472,7 @@
                       <a:r>
                         <a:rPr sz="1400" b="1">
                           <a:solidFill>
-                            <a:srgbClr val="FFFFFF"/>
+                            <a:srgbClr val="26231F"/>
                           </a:solidFill>
                         </a:rPr>
                         <a:t>가입 확인</a:t>
@@ -6195,30 +6482,30 @@
                   <a:tcPr anchor="ctr" marL="73152" marR="73152">
                     <a:lnL w="9525" cap="flat" cmpd="sng" algn="ctr">
                       <a:solidFill>
-                        <a:srgbClr val="765037"/>
+                        <a:srgbClr val="D89F79"/>
                       </a:solidFill>
                       <a:prstDash val="solid"/>
                     </a:lnL>
                     <a:lnR w="9525" cap="flat" cmpd="sng" algn="ctr">
                       <a:solidFill>
-                        <a:srgbClr val="765037"/>
+                        <a:srgbClr val="D89F79"/>
                       </a:solidFill>
                       <a:prstDash val="solid"/>
                     </a:lnR>
                     <a:lnT w="9525" cap="flat" cmpd="sng" algn="ctr">
                       <a:solidFill>
-                        <a:srgbClr val="765037"/>
+                        <a:srgbClr val="D89F79"/>
                       </a:solidFill>
                       <a:prstDash val="solid"/>
                     </a:lnT>
                     <a:lnB w="9525" cap="flat" cmpd="sng" algn="ctr">
                       <a:solidFill>
-                        <a:srgbClr val="765037"/>
+                        <a:srgbClr val="D89F79"/>
                       </a:solidFill>
                       <a:prstDash val="solid"/>
                     </a:lnB>
                     <a:solidFill>
-                      <a:srgbClr val="765037"/>
+                      <a:srgbClr val="D89F79"/>
                     </a:solidFill>
                   </a:tcPr>
                 </a:tc>
@@ -6231,7 +6518,7 @@
                       <a:r>
                         <a:rPr sz="1400" b="1">
                           <a:solidFill>
-                            <a:srgbClr val="FFFFFF"/>
+                            <a:srgbClr val="26231F"/>
                           </a:solidFill>
                         </a:rPr>
                         <a:t>확인 필요</a:t>
@@ -6241,30 +6528,30 @@
                   <a:tcPr anchor="ctr" marL="73152" marR="73152">
                     <a:lnL w="9525" cap="flat" cmpd="sng" algn="ctr">
                       <a:solidFill>
-                        <a:srgbClr val="765037"/>
+                        <a:srgbClr val="D89F79"/>
                       </a:solidFill>
                       <a:prstDash val="solid"/>
                     </a:lnL>
                     <a:lnR w="9525" cap="flat" cmpd="sng" algn="ctr">
                       <a:solidFill>
-                        <a:srgbClr val="765037"/>
+                        <a:srgbClr val="D89F79"/>
                       </a:solidFill>
                       <a:prstDash val="solid"/>
                     </a:lnR>
                     <a:lnT w="9525" cap="flat" cmpd="sng" algn="ctr">
                       <a:solidFill>
-                        <a:srgbClr val="765037"/>
+                        <a:srgbClr val="D89F79"/>
                       </a:solidFill>
                       <a:prstDash val="solid"/>
                     </a:lnT>
                     <a:lnB w="9525" cap="flat" cmpd="sng" algn="ctr">
                       <a:solidFill>
-                        <a:srgbClr val="765037"/>
+                        <a:srgbClr val="D89F79"/>
                       </a:solidFill>
                       <a:prstDash val="solid"/>
                     </a:lnB>
                     <a:solidFill>
-                      <a:srgbClr val="765037"/>
+                      <a:srgbClr val="D89F79"/>
                     </a:solidFill>
                   </a:tcPr>
                 </a:tc>
@@ -6277,7 +6564,7 @@
                       <a:r>
                         <a:rPr sz="1400" b="1">
                           <a:solidFill>
-                            <a:srgbClr val="FFFFFF"/>
+                            <a:srgbClr val="26231F"/>
                           </a:solidFill>
                         </a:rPr>
                         <a:t>해당 없음</a:t>
@@ -6287,30 +6574,30 @@
                   <a:tcPr anchor="ctr" marL="73152" marR="73152">
                     <a:lnL w="9525" cap="flat" cmpd="sng" algn="ctr">
                       <a:solidFill>
-                        <a:srgbClr val="765037"/>
+                        <a:srgbClr val="D89F79"/>
                       </a:solidFill>
                       <a:prstDash val="solid"/>
                     </a:lnL>
                     <a:lnR w="9525" cap="flat" cmpd="sng" algn="ctr">
                       <a:solidFill>
-                        <a:srgbClr val="765037"/>
+                        <a:srgbClr val="D89F79"/>
                       </a:solidFill>
                       <a:prstDash val="solid"/>
                     </a:lnR>
                     <a:lnT w="9525" cap="flat" cmpd="sng" algn="ctr">
                       <a:solidFill>
-                        <a:srgbClr val="765037"/>
+                        <a:srgbClr val="D89F79"/>
                       </a:solidFill>
                       <a:prstDash val="solid"/>
                     </a:lnT>
                     <a:lnB w="9525" cap="flat" cmpd="sng" algn="ctr">
                       <a:solidFill>
-                        <a:srgbClr val="765037"/>
+                        <a:srgbClr val="D89F79"/>
                       </a:solidFill>
                       <a:prstDash val="solid"/>
                     </a:lnB>
                     <a:solidFill>
-                      <a:srgbClr val="765037"/>
+                      <a:srgbClr val="D89F79"/>
                     </a:solidFill>
                   </a:tcPr>
                 </a:tc>
@@ -6325,7 +6612,7 @@
                       <a:r>
                         <a:rPr sz="1400" b="1">
                           <a:solidFill>
-                            <a:srgbClr val="37261A"/>
+                            <a:srgbClr val="493527"/>
                           </a:solidFill>
                         </a:rPr>
                         <a:t>사망·재해</a:t>
@@ -6335,30 +6622,30 @@
                   <a:tcPr anchor="ctr" marL="73152" marR="73152">
                     <a:lnL w="9525" cap="flat" cmpd="sng" algn="ctr">
                       <a:solidFill>
-                        <a:srgbClr val="EDDED4"/>
+                        <a:srgbClr val="F6E2D5"/>
                       </a:solidFill>
                       <a:prstDash val="solid"/>
                     </a:lnL>
                     <a:lnR w="9525" cap="flat" cmpd="sng" algn="ctr">
                       <a:solidFill>
-                        <a:srgbClr val="EDDED4"/>
+                        <a:srgbClr val="F6E2D5"/>
                       </a:solidFill>
                       <a:prstDash val="solid"/>
                     </a:lnR>
                     <a:lnT w="9525" cap="flat" cmpd="sng" algn="ctr">
                       <a:solidFill>
-                        <a:srgbClr val="EDDED4"/>
+                        <a:srgbClr val="F6E2D5"/>
                       </a:solidFill>
                       <a:prstDash val="solid"/>
                     </a:lnT>
                     <a:lnB w="9525" cap="flat" cmpd="sng" algn="ctr">
                       <a:solidFill>
-                        <a:srgbClr val="EDDED4"/>
+                        <a:srgbClr val="F6E2D5"/>
                       </a:solidFill>
                       <a:prstDash val="solid"/>
                     </a:lnB>
                     <a:solidFill>
-                      <a:srgbClr val="EDDED4"/>
+                      <a:srgbClr val="F6E2D5"/>
                     </a:solidFill>
                   </a:tcPr>
                 </a:tc>
@@ -6371,7 +6658,7 @@
                       <a:r>
                         <a:rPr sz="1400" b="0">
                           <a:solidFill>
-                            <a:srgbClr val="2B2B2B"/>
+                            <a:srgbClr val="26231F"/>
                           </a:solidFill>
                         </a:rPr>
                         <a:t>□</a:t>
@@ -6381,25 +6668,25 @@
                   <a:tcPr anchor="ctr" marL="73152" marR="73152">
                     <a:lnL w="9525" cap="flat" cmpd="sng" algn="ctr">
                       <a:solidFill>
-                        <a:srgbClr val="EDDED4"/>
+                        <a:srgbClr val="F6E2D5"/>
                       </a:solidFill>
                       <a:prstDash val="solid"/>
                     </a:lnL>
                     <a:lnR w="9525" cap="flat" cmpd="sng" algn="ctr">
                       <a:solidFill>
-                        <a:srgbClr val="EDDED4"/>
+                        <a:srgbClr val="F6E2D5"/>
                       </a:solidFill>
                       <a:prstDash val="solid"/>
                     </a:lnR>
                     <a:lnT w="9525" cap="flat" cmpd="sng" algn="ctr">
                       <a:solidFill>
-                        <a:srgbClr val="EDDED4"/>
+                        <a:srgbClr val="F6E2D5"/>
                       </a:solidFill>
                       <a:prstDash val="solid"/>
                     </a:lnT>
                     <a:lnB w="9525" cap="flat" cmpd="sng" algn="ctr">
                       <a:solidFill>
-                        <a:srgbClr val="EDDED4"/>
+                        <a:srgbClr val="F6E2D5"/>
                       </a:solidFill>
                       <a:prstDash val="solid"/>
                     </a:lnB>
@@ -6417,7 +6704,7 @@
                       <a:r>
                         <a:rPr sz="1400" b="0">
                           <a:solidFill>
-                            <a:srgbClr val="2B2B2B"/>
+                            <a:srgbClr val="26231F"/>
                           </a:solidFill>
                         </a:rPr>
                         <a:t>□</a:t>
@@ -6427,25 +6714,25 @@
                   <a:tcPr anchor="ctr" marL="73152" marR="73152">
                     <a:lnL w="9525" cap="flat" cmpd="sng" algn="ctr">
                       <a:solidFill>
-                        <a:srgbClr val="EDDED4"/>
+                        <a:srgbClr val="F6E2D5"/>
                       </a:solidFill>
                       <a:prstDash val="solid"/>
                     </a:lnL>
                     <a:lnR w="9525" cap="flat" cmpd="sng" algn="ctr">
                       <a:solidFill>
-                        <a:srgbClr val="EDDED4"/>
+                        <a:srgbClr val="F6E2D5"/>
                       </a:solidFill>
                       <a:prstDash val="solid"/>
                     </a:lnR>
                     <a:lnT w="9525" cap="flat" cmpd="sng" algn="ctr">
                       <a:solidFill>
-                        <a:srgbClr val="EDDED4"/>
+                        <a:srgbClr val="F6E2D5"/>
                       </a:solidFill>
                       <a:prstDash val="solid"/>
                     </a:lnT>
                     <a:lnB w="9525" cap="flat" cmpd="sng" algn="ctr">
                       <a:solidFill>
-                        <a:srgbClr val="EDDED4"/>
+                        <a:srgbClr val="F6E2D5"/>
                       </a:solidFill>
                       <a:prstDash val="solid"/>
                     </a:lnB>
@@ -6463,7 +6750,7 @@
                       <a:r>
                         <a:rPr sz="1400" b="0">
                           <a:solidFill>
-                            <a:srgbClr val="2B2B2B"/>
+                            <a:srgbClr val="26231F"/>
                           </a:solidFill>
                         </a:rPr>
                         <a:t>□</a:t>
@@ -6473,25 +6760,25 @@
                   <a:tcPr anchor="ctr" marL="73152" marR="73152">
                     <a:lnL w="9525" cap="flat" cmpd="sng" algn="ctr">
                       <a:solidFill>
-                        <a:srgbClr val="EDDED4"/>
+                        <a:srgbClr val="F6E2D5"/>
                       </a:solidFill>
                       <a:prstDash val="solid"/>
                     </a:lnL>
                     <a:lnR w="9525" cap="flat" cmpd="sng" algn="ctr">
                       <a:solidFill>
-                        <a:srgbClr val="EDDED4"/>
+                        <a:srgbClr val="F6E2D5"/>
                       </a:solidFill>
                       <a:prstDash val="solid"/>
                     </a:lnR>
                     <a:lnT w="9525" cap="flat" cmpd="sng" algn="ctr">
                       <a:solidFill>
-                        <a:srgbClr val="EDDED4"/>
+                        <a:srgbClr val="F6E2D5"/>
                       </a:solidFill>
                       <a:prstDash val="solid"/>
                     </a:lnT>
                     <a:lnB w="9525" cap="flat" cmpd="sng" algn="ctr">
                       <a:solidFill>
-                        <a:srgbClr val="EDDED4"/>
+                        <a:srgbClr val="F6E2D5"/>
                       </a:solidFill>
                       <a:prstDash val="solid"/>
                     </a:lnB>
@@ -6511,7 +6798,7 @@
                       <a:r>
                         <a:rPr sz="1400" b="1">
                           <a:solidFill>
-                            <a:srgbClr val="37261A"/>
+                            <a:srgbClr val="493527"/>
                           </a:solidFill>
                         </a:rPr>
                         <a:t>질병 진단</a:t>
@@ -6521,30 +6808,30 @@
                   <a:tcPr anchor="ctr" marL="73152" marR="73152">
                     <a:lnL w="9525" cap="flat" cmpd="sng" algn="ctr">
                       <a:solidFill>
-                        <a:srgbClr val="EDDED4"/>
+                        <a:srgbClr val="F6E2D5"/>
                       </a:solidFill>
                       <a:prstDash val="solid"/>
                     </a:lnL>
                     <a:lnR w="9525" cap="flat" cmpd="sng" algn="ctr">
                       <a:solidFill>
-                        <a:srgbClr val="EDDED4"/>
+                        <a:srgbClr val="F6E2D5"/>
                       </a:solidFill>
                       <a:prstDash val="solid"/>
                     </a:lnR>
                     <a:lnT w="9525" cap="flat" cmpd="sng" algn="ctr">
                       <a:solidFill>
-                        <a:srgbClr val="EDDED4"/>
+                        <a:srgbClr val="F6E2D5"/>
                       </a:solidFill>
                       <a:prstDash val="solid"/>
                     </a:lnT>
                     <a:lnB w="9525" cap="flat" cmpd="sng" algn="ctr">
                       <a:solidFill>
-                        <a:srgbClr val="EDDED4"/>
+                        <a:srgbClr val="F6E2D5"/>
                       </a:solidFill>
                       <a:prstDash val="solid"/>
                     </a:lnB>
                     <a:solidFill>
-                      <a:srgbClr val="EDDED4"/>
+                      <a:srgbClr val="F6E2D5"/>
                     </a:solidFill>
                   </a:tcPr>
                 </a:tc>
@@ -6557,7 +6844,7 @@
                       <a:r>
                         <a:rPr sz="1400" b="0">
                           <a:solidFill>
-                            <a:srgbClr val="2B2B2B"/>
+                            <a:srgbClr val="26231F"/>
                           </a:solidFill>
                         </a:rPr>
                         <a:t>□</a:t>
@@ -6567,30 +6854,30 @@
                   <a:tcPr anchor="ctr" marL="73152" marR="73152">
                     <a:lnL w="9525" cap="flat" cmpd="sng" algn="ctr">
                       <a:solidFill>
-                        <a:srgbClr val="EDDED4"/>
+                        <a:srgbClr val="F6E2D5"/>
                       </a:solidFill>
                       <a:prstDash val="solid"/>
                     </a:lnL>
                     <a:lnR w="9525" cap="flat" cmpd="sng" algn="ctr">
                       <a:solidFill>
-                        <a:srgbClr val="EDDED4"/>
+                        <a:srgbClr val="F6E2D5"/>
                       </a:solidFill>
                       <a:prstDash val="solid"/>
                     </a:lnR>
                     <a:lnT w="9525" cap="flat" cmpd="sng" algn="ctr">
                       <a:solidFill>
-                        <a:srgbClr val="EDDED4"/>
+                        <a:srgbClr val="F6E2D5"/>
                       </a:solidFill>
                       <a:prstDash val="solid"/>
                     </a:lnT>
                     <a:lnB w="9525" cap="flat" cmpd="sng" algn="ctr">
                       <a:solidFill>
-                        <a:srgbClr val="EDDED4"/>
+                        <a:srgbClr val="F6E2D5"/>
                       </a:solidFill>
                       <a:prstDash val="solid"/>
                     </a:lnB>
                     <a:solidFill>
-                      <a:srgbClr val="F8F4F1"/>
+                      <a:srgbClr val="FBF2EC"/>
                     </a:solidFill>
                   </a:tcPr>
                 </a:tc>
@@ -6603,7 +6890,7 @@
                       <a:r>
                         <a:rPr sz="1400" b="0">
                           <a:solidFill>
-                            <a:srgbClr val="2B2B2B"/>
+                            <a:srgbClr val="26231F"/>
                           </a:solidFill>
                         </a:rPr>
                         <a:t>□</a:t>
@@ -6613,30 +6900,30 @@
                   <a:tcPr anchor="ctr" marL="73152" marR="73152">
                     <a:lnL w="9525" cap="flat" cmpd="sng" algn="ctr">
                       <a:solidFill>
-                        <a:srgbClr val="EDDED4"/>
+                        <a:srgbClr val="F6E2D5"/>
                       </a:solidFill>
                       <a:prstDash val="solid"/>
                     </a:lnL>
                     <a:lnR w="9525" cap="flat" cmpd="sng" algn="ctr">
                       <a:solidFill>
-                        <a:srgbClr val="EDDED4"/>
+                        <a:srgbClr val="F6E2D5"/>
                       </a:solidFill>
                       <a:prstDash val="solid"/>
                     </a:lnR>
                     <a:lnT w="9525" cap="flat" cmpd="sng" algn="ctr">
                       <a:solidFill>
-                        <a:srgbClr val="EDDED4"/>
+                        <a:srgbClr val="F6E2D5"/>
                       </a:solidFill>
                       <a:prstDash val="solid"/>
                     </a:lnT>
                     <a:lnB w="9525" cap="flat" cmpd="sng" algn="ctr">
                       <a:solidFill>
-                        <a:srgbClr val="EDDED4"/>
+                        <a:srgbClr val="F6E2D5"/>
                       </a:solidFill>
                       <a:prstDash val="solid"/>
                     </a:lnB>
                     <a:solidFill>
-                      <a:srgbClr val="F8F4F1"/>
+                      <a:srgbClr val="FBF2EC"/>
                     </a:solidFill>
                   </a:tcPr>
                 </a:tc>
@@ -6649,7 +6936,7 @@
                       <a:r>
                         <a:rPr sz="1400" b="0">
                           <a:solidFill>
-                            <a:srgbClr val="2B2B2B"/>
+                            <a:srgbClr val="26231F"/>
                           </a:solidFill>
                         </a:rPr>
                         <a:t>□</a:t>
@@ -6659,30 +6946,30 @@
                   <a:tcPr anchor="ctr" marL="73152" marR="73152">
                     <a:lnL w="9525" cap="flat" cmpd="sng" algn="ctr">
                       <a:solidFill>
-                        <a:srgbClr val="EDDED4"/>
+                        <a:srgbClr val="F6E2D5"/>
                       </a:solidFill>
                       <a:prstDash val="solid"/>
                     </a:lnL>
                     <a:lnR w="9525" cap="flat" cmpd="sng" algn="ctr">
                       <a:solidFill>
-                        <a:srgbClr val="EDDED4"/>
+                        <a:srgbClr val="F6E2D5"/>
                       </a:solidFill>
                       <a:prstDash val="solid"/>
                     </a:lnR>
                     <a:lnT w="9525" cap="flat" cmpd="sng" algn="ctr">
                       <a:solidFill>
-                        <a:srgbClr val="EDDED4"/>
+                        <a:srgbClr val="F6E2D5"/>
                       </a:solidFill>
                       <a:prstDash val="solid"/>
                     </a:lnT>
                     <a:lnB w="9525" cap="flat" cmpd="sng" algn="ctr">
                       <a:solidFill>
-                        <a:srgbClr val="EDDED4"/>
+                        <a:srgbClr val="F6E2D5"/>
                       </a:solidFill>
                       <a:prstDash val="solid"/>
                     </a:lnB>
                     <a:solidFill>
-                      <a:srgbClr val="F8F4F1"/>
+                      <a:srgbClr val="FBF2EC"/>
                     </a:solidFill>
                   </a:tcPr>
                 </a:tc>
@@ -6697,7 +6984,7 @@
                       <a:r>
                         <a:rPr sz="1400" b="1">
                           <a:solidFill>
-                            <a:srgbClr val="37261A"/>
+                            <a:srgbClr val="493527"/>
                           </a:solidFill>
                         </a:rPr>
                         <a:t>암</a:t>
@@ -6707,30 +6994,30 @@
                   <a:tcPr anchor="ctr" marL="73152" marR="73152">
                     <a:lnL w="9525" cap="flat" cmpd="sng" algn="ctr">
                       <a:solidFill>
-                        <a:srgbClr val="EDDED4"/>
+                        <a:srgbClr val="F6E2D5"/>
                       </a:solidFill>
                       <a:prstDash val="solid"/>
                     </a:lnL>
                     <a:lnR w="9525" cap="flat" cmpd="sng" algn="ctr">
                       <a:solidFill>
-                        <a:srgbClr val="EDDED4"/>
+                        <a:srgbClr val="F6E2D5"/>
                       </a:solidFill>
                       <a:prstDash val="solid"/>
                     </a:lnR>
                     <a:lnT w="9525" cap="flat" cmpd="sng" algn="ctr">
                       <a:solidFill>
-                        <a:srgbClr val="EDDED4"/>
+                        <a:srgbClr val="F6E2D5"/>
                       </a:solidFill>
                       <a:prstDash val="solid"/>
                     </a:lnT>
                     <a:lnB w="9525" cap="flat" cmpd="sng" algn="ctr">
                       <a:solidFill>
-                        <a:srgbClr val="EDDED4"/>
+                        <a:srgbClr val="F6E2D5"/>
                       </a:solidFill>
                       <a:prstDash val="solid"/>
                     </a:lnB>
                     <a:solidFill>
-                      <a:srgbClr val="EDDED4"/>
+                      <a:srgbClr val="F6E2D5"/>
                     </a:solidFill>
                   </a:tcPr>
                 </a:tc>
@@ -6743,7 +7030,7 @@
                       <a:r>
                         <a:rPr sz="1400" b="0">
                           <a:solidFill>
-                            <a:srgbClr val="2B2B2B"/>
+                            <a:srgbClr val="26231F"/>
                           </a:solidFill>
                         </a:rPr>
                         <a:t>□</a:t>
@@ -6753,25 +7040,25 @@
                   <a:tcPr anchor="ctr" marL="73152" marR="73152">
                     <a:lnL w="9525" cap="flat" cmpd="sng" algn="ctr">
                       <a:solidFill>
-                        <a:srgbClr val="EDDED4"/>
+                        <a:srgbClr val="F6E2D5"/>
                       </a:solidFill>
                       <a:prstDash val="solid"/>
                     </a:lnL>
                     <a:lnR w="9525" cap="flat" cmpd="sng" algn="ctr">
                       <a:solidFill>
-                        <a:srgbClr val="EDDED4"/>
+                        <a:srgbClr val="F6E2D5"/>
                       </a:solidFill>
                       <a:prstDash val="solid"/>
                     </a:lnR>
                     <a:lnT w="9525" cap="flat" cmpd="sng" algn="ctr">
                       <a:solidFill>
-                        <a:srgbClr val="EDDED4"/>
+                        <a:srgbClr val="F6E2D5"/>
                       </a:solidFill>
                       <a:prstDash val="solid"/>
                     </a:lnT>
                     <a:lnB w="9525" cap="flat" cmpd="sng" algn="ctr">
                       <a:solidFill>
-                        <a:srgbClr val="EDDED4"/>
+                        <a:srgbClr val="F6E2D5"/>
                       </a:solidFill>
                       <a:prstDash val="solid"/>
                     </a:lnB>
@@ -6789,7 +7076,7 @@
                       <a:r>
                         <a:rPr sz="1400" b="0">
                           <a:solidFill>
-                            <a:srgbClr val="2B2B2B"/>
+                            <a:srgbClr val="26231F"/>
                           </a:solidFill>
                         </a:rPr>
                         <a:t>□</a:t>
@@ -6799,25 +7086,25 @@
                   <a:tcPr anchor="ctr" marL="73152" marR="73152">
                     <a:lnL w="9525" cap="flat" cmpd="sng" algn="ctr">
                       <a:solidFill>
-                        <a:srgbClr val="EDDED4"/>
+                        <a:srgbClr val="F6E2D5"/>
                       </a:solidFill>
                       <a:prstDash val="solid"/>
                     </a:lnL>
                     <a:lnR w="9525" cap="flat" cmpd="sng" algn="ctr">
                       <a:solidFill>
-                        <a:srgbClr val="EDDED4"/>
+                        <a:srgbClr val="F6E2D5"/>
                       </a:solidFill>
                       <a:prstDash val="solid"/>
                     </a:lnR>
                     <a:lnT w="9525" cap="flat" cmpd="sng" algn="ctr">
                       <a:solidFill>
-                        <a:srgbClr val="EDDED4"/>
+                        <a:srgbClr val="F6E2D5"/>
                       </a:solidFill>
                       <a:prstDash val="solid"/>
                     </a:lnT>
                     <a:lnB w="9525" cap="flat" cmpd="sng" algn="ctr">
                       <a:solidFill>
-                        <a:srgbClr val="EDDED4"/>
+                        <a:srgbClr val="F6E2D5"/>
                       </a:solidFill>
                       <a:prstDash val="solid"/>
                     </a:lnB>
@@ -6835,7 +7122,7 @@
                       <a:r>
                         <a:rPr sz="1400" b="0">
                           <a:solidFill>
-                            <a:srgbClr val="2B2B2B"/>
+                            <a:srgbClr val="26231F"/>
                           </a:solidFill>
                         </a:rPr>
                         <a:t>□</a:t>
@@ -6845,25 +7132,25 @@
                   <a:tcPr anchor="ctr" marL="73152" marR="73152">
                     <a:lnL w="9525" cap="flat" cmpd="sng" algn="ctr">
                       <a:solidFill>
-                        <a:srgbClr val="EDDED4"/>
+                        <a:srgbClr val="F6E2D5"/>
                       </a:solidFill>
                       <a:prstDash val="solid"/>
                     </a:lnL>
                     <a:lnR w="9525" cap="flat" cmpd="sng" algn="ctr">
                       <a:solidFill>
-                        <a:srgbClr val="EDDED4"/>
+                        <a:srgbClr val="F6E2D5"/>
                       </a:solidFill>
                       <a:prstDash val="solid"/>
                     </a:lnR>
                     <a:lnT w="9525" cap="flat" cmpd="sng" algn="ctr">
                       <a:solidFill>
-                        <a:srgbClr val="EDDED4"/>
+                        <a:srgbClr val="F6E2D5"/>
                       </a:solidFill>
                       <a:prstDash val="solid"/>
                     </a:lnT>
                     <a:lnB w="9525" cap="flat" cmpd="sng" algn="ctr">
                       <a:solidFill>
-                        <a:srgbClr val="EDDED4"/>
+                        <a:srgbClr val="F6E2D5"/>
                       </a:solidFill>
                       <a:prstDash val="solid"/>
                     </a:lnB>
@@ -6883,7 +7170,7 @@
                       <a:r>
                         <a:rPr sz="1400" b="1">
                           <a:solidFill>
-                            <a:srgbClr val="37261A"/>
+                            <a:srgbClr val="493527"/>
                           </a:solidFill>
                         </a:rPr>
                         <a:t>뇌·심장</a:t>
@@ -6893,30 +7180,30 @@
                   <a:tcPr anchor="ctr" marL="73152" marR="73152">
                     <a:lnL w="9525" cap="flat" cmpd="sng" algn="ctr">
                       <a:solidFill>
-                        <a:srgbClr val="EDDED4"/>
+                        <a:srgbClr val="F6E2D5"/>
                       </a:solidFill>
                       <a:prstDash val="solid"/>
                     </a:lnL>
                     <a:lnR w="9525" cap="flat" cmpd="sng" algn="ctr">
                       <a:solidFill>
-                        <a:srgbClr val="EDDED4"/>
+                        <a:srgbClr val="F6E2D5"/>
                       </a:solidFill>
                       <a:prstDash val="solid"/>
                     </a:lnR>
                     <a:lnT w="9525" cap="flat" cmpd="sng" algn="ctr">
                       <a:solidFill>
-                        <a:srgbClr val="EDDED4"/>
+                        <a:srgbClr val="F6E2D5"/>
                       </a:solidFill>
                       <a:prstDash val="solid"/>
                     </a:lnT>
                     <a:lnB w="9525" cap="flat" cmpd="sng" algn="ctr">
                       <a:solidFill>
-                        <a:srgbClr val="EDDED4"/>
+                        <a:srgbClr val="F6E2D5"/>
                       </a:solidFill>
                       <a:prstDash val="solid"/>
                     </a:lnB>
                     <a:solidFill>
-                      <a:srgbClr val="EDDED4"/>
+                      <a:srgbClr val="F6E2D5"/>
                     </a:solidFill>
                   </a:tcPr>
                 </a:tc>
@@ -6929,7 +7216,7 @@
                       <a:r>
                         <a:rPr sz="1400" b="0">
                           <a:solidFill>
-                            <a:srgbClr val="2B2B2B"/>
+                            <a:srgbClr val="26231F"/>
                           </a:solidFill>
                         </a:rPr>
                         <a:t>□</a:t>
@@ -6939,30 +7226,30 @@
                   <a:tcPr anchor="ctr" marL="73152" marR="73152">
                     <a:lnL w="9525" cap="flat" cmpd="sng" algn="ctr">
                       <a:solidFill>
-                        <a:srgbClr val="EDDED4"/>
+                        <a:srgbClr val="F6E2D5"/>
                       </a:solidFill>
                       <a:prstDash val="solid"/>
                     </a:lnL>
                     <a:lnR w="9525" cap="flat" cmpd="sng" algn="ctr">
                       <a:solidFill>
-                        <a:srgbClr val="EDDED4"/>
+                        <a:srgbClr val="F6E2D5"/>
                       </a:solidFill>
                       <a:prstDash val="solid"/>
                     </a:lnR>
                     <a:lnT w="9525" cap="flat" cmpd="sng" algn="ctr">
                       <a:solidFill>
-                        <a:srgbClr val="EDDED4"/>
+                        <a:srgbClr val="F6E2D5"/>
                       </a:solidFill>
                       <a:prstDash val="solid"/>
                     </a:lnT>
                     <a:lnB w="9525" cap="flat" cmpd="sng" algn="ctr">
                       <a:solidFill>
-                        <a:srgbClr val="EDDED4"/>
+                        <a:srgbClr val="F6E2D5"/>
                       </a:solidFill>
                       <a:prstDash val="solid"/>
                     </a:lnB>
                     <a:solidFill>
-                      <a:srgbClr val="F8F4F1"/>
+                      <a:srgbClr val="FBF2EC"/>
                     </a:solidFill>
                   </a:tcPr>
                 </a:tc>
@@ -6975,7 +7262,7 @@
                       <a:r>
                         <a:rPr sz="1400" b="0">
                           <a:solidFill>
-                            <a:srgbClr val="2B2B2B"/>
+                            <a:srgbClr val="26231F"/>
                           </a:solidFill>
                         </a:rPr>
                         <a:t>□</a:t>
@@ -6985,30 +7272,30 @@
                   <a:tcPr anchor="ctr" marL="73152" marR="73152">
                     <a:lnL w="9525" cap="flat" cmpd="sng" algn="ctr">
                       <a:solidFill>
-                        <a:srgbClr val="EDDED4"/>
+                        <a:srgbClr val="F6E2D5"/>
                       </a:solidFill>
                       <a:prstDash val="solid"/>
                     </a:lnL>
                     <a:lnR w="9525" cap="flat" cmpd="sng" algn="ctr">
                       <a:solidFill>
-                        <a:srgbClr val="EDDED4"/>
+                        <a:srgbClr val="F6E2D5"/>
                       </a:solidFill>
                       <a:prstDash val="solid"/>
                     </a:lnR>
                     <a:lnT w="9525" cap="flat" cmpd="sng" algn="ctr">
                       <a:solidFill>
-                        <a:srgbClr val="EDDED4"/>
+                        <a:srgbClr val="F6E2D5"/>
                       </a:solidFill>
                       <a:prstDash val="solid"/>
                     </a:lnT>
                     <a:lnB w="9525" cap="flat" cmpd="sng" algn="ctr">
                       <a:solidFill>
-                        <a:srgbClr val="EDDED4"/>
+                        <a:srgbClr val="F6E2D5"/>
                       </a:solidFill>
                       <a:prstDash val="solid"/>
                     </a:lnB>
                     <a:solidFill>
-                      <a:srgbClr val="F8F4F1"/>
+                      <a:srgbClr val="FBF2EC"/>
                     </a:solidFill>
                   </a:tcPr>
                 </a:tc>
@@ -7021,7 +7308,7 @@
                       <a:r>
                         <a:rPr sz="1400" b="0">
                           <a:solidFill>
-                            <a:srgbClr val="2B2B2B"/>
+                            <a:srgbClr val="26231F"/>
                           </a:solidFill>
                         </a:rPr>
                         <a:t>□</a:t>
@@ -7031,30 +7318,30 @@
                   <a:tcPr anchor="ctr" marL="73152" marR="73152">
                     <a:lnL w="9525" cap="flat" cmpd="sng" algn="ctr">
                       <a:solidFill>
-                        <a:srgbClr val="EDDED4"/>
+                        <a:srgbClr val="F6E2D5"/>
                       </a:solidFill>
                       <a:prstDash val="solid"/>
                     </a:lnL>
                     <a:lnR w="9525" cap="flat" cmpd="sng" algn="ctr">
                       <a:solidFill>
-                        <a:srgbClr val="EDDED4"/>
+                        <a:srgbClr val="F6E2D5"/>
                       </a:solidFill>
                       <a:prstDash val="solid"/>
                     </a:lnR>
                     <a:lnT w="9525" cap="flat" cmpd="sng" algn="ctr">
                       <a:solidFill>
-                        <a:srgbClr val="EDDED4"/>
+                        <a:srgbClr val="F6E2D5"/>
                       </a:solidFill>
                       <a:prstDash val="solid"/>
                     </a:lnT>
                     <a:lnB w="9525" cap="flat" cmpd="sng" algn="ctr">
                       <a:solidFill>
-                        <a:srgbClr val="EDDED4"/>
+                        <a:srgbClr val="F6E2D5"/>
                       </a:solidFill>
                       <a:prstDash val="solid"/>
                     </a:lnB>
                     <a:solidFill>
-                      <a:srgbClr val="F8F4F1"/>
+                      <a:srgbClr val="FBF2EC"/>
                     </a:solidFill>
                   </a:tcPr>
                 </a:tc>
@@ -7069,7 +7356,7 @@
                       <a:r>
                         <a:rPr sz="1400" b="1">
                           <a:solidFill>
-                            <a:srgbClr val="37261A"/>
+                            <a:srgbClr val="493527"/>
                           </a:solidFill>
                         </a:rPr>
                         <a:t>입원·수술</a:t>
@@ -7079,30 +7366,30 @@
                   <a:tcPr anchor="ctr" marL="73152" marR="73152">
                     <a:lnL w="9525" cap="flat" cmpd="sng" algn="ctr">
                       <a:solidFill>
-                        <a:srgbClr val="EDDED4"/>
+                        <a:srgbClr val="F6E2D5"/>
                       </a:solidFill>
                       <a:prstDash val="solid"/>
                     </a:lnL>
                     <a:lnR w="9525" cap="flat" cmpd="sng" algn="ctr">
                       <a:solidFill>
-                        <a:srgbClr val="EDDED4"/>
+                        <a:srgbClr val="F6E2D5"/>
                       </a:solidFill>
                       <a:prstDash val="solid"/>
                     </a:lnR>
                     <a:lnT w="9525" cap="flat" cmpd="sng" algn="ctr">
                       <a:solidFill>
-                        <a:srgbClr val="EDDED4"/>
+                        <a:srgbClr val="F6E2D5"/>
                       </a:solidFill>
                       <a:prstDash val="solid"/>
                     </a:lnT>
                     <a:lnB w="9525" cap="flat" cmpd="sng" algn="ctr">
                       <a:solidFill>
-                        <a:srgbClr val="EDDED4"/>
+                        <a:srgbClr val="F6E2D5"/>
                       </a:solidFill>
                       <a:prstDash val="solid"/>
                     </a:lnB>
                     <a:solidFill>
-                      <a:srgbClr val="EDDED4"/>
+                      <a:srgbClr val="F6E2D5"/>
                     </a:solidFill>
                   </a:tcPr>
                 </a:tc>
@@ -7115,7 +7402,7 @@
                       <a:r>
                         <a:rPr sz="1400" b="0">
                           <a:solidFill>
-                            <a:srgbClr val="2B2B2B"/>
+                            <a:srgbClr val="26231F"/>
                           </a:solidFill>
                         </a:rPr>
                         <a:t>□</a:t>
@@ -7125,25 +7412,25 @@
                   <a:tcPr anchor="ctr" marL="73152" marR="73152">
                     <a:lnL w="9525" cap="flat" cmpd="sng" algn="ctr">
                       <a:solidFill>
-                        <a:srgbClr val="EDDED4"/>
+                        <a:srgbClr val="F6E2D5"/>
                       </a:solidFill>
                       <a:prstDash val="solid"/>
                     </a:lnL>
                     <a:lnR w="9525" cap="flat" cmpd="sng" algn="ctr">
                       <a:solidFill>
-                        <a:srgbClr val="EDDED4"/>
+                        <a:srgbClr val="F6E2D5"/>
                       </a:solidFill>
                       <a:prstDash val="solid"/>
                     </a:lnR>
                     <a:lnT w="9525" cap="flat" cmpd="sng" algn="ctr">
                       <a:solidFill>
-                        <a:srgbClr val="EDDED4"/>
+                        <a:srgbClr val="F6E2D5"/>
                       </a:solidFill>
                       <a:prstDash val="solid"/>
                     </a:lnT>
                     <a:lnB w="9525" cap="flat" cmpd="sng" algn="ctr">
                       <a:solidFill>
-                        <a:srgbClr val="EDDED4"/>
+                        <a:srgbClr val="F6E2D5"/>
                       </a:solidFill>
                       <a:prstDash val="solid"/>
                     </a:lnB>
@@ -7161,7 +7448,7 @@
                       <a:r>
                         <a:rPr sz="1400" b="0">
                           <a:solidFill>
-                            <a:srgbClr val="2B2B2B"/>
+                            <a:srgbClr val="26231F"/>
                           </a:solidFill>
                         </a:rPr>
                         <a:t>□</a:t>
@@ -7171,25 +7458,25 @@
                   <a:tcPr anchor="ctr" marL="73152" marR="73152">
                     <a:lnL w="9525" cap="flat" cmpd="sng" algn="ctr">
                       <a:solidFill>
-                        <a:srgbClr val="EDDED4"/>
+                        <a:srgbClr val="F6E2D5"/>
                       </a:solidFill>
                       <a:prstDash val="solid"/>
                     </a:lnL>
                     <a:lnR w="9525" cap="flat" cmpd="sng" algn="ctr">
                       <a:solidFill>
-                        <a:srgbClr val="EDDED4"/>
+                        <a:srgbClr val="F6E2D5"/>
                       </a:solidFill>
                       <a:prstDash val="solid"/>
                     </a:lnR>
                     <a:lnT w="9525" cap="flat" cmpd="sng" algn="ctr">
                       <a:solidFill>
-                        <a:srgbClr val="EDDED4"/>
+                        <a:srgbClr val="F6E2D5"/>
                       </a:solidFill>
                       <a:prstDash val="solid"/>
                     </a:lnT>
                     <a:lnB w="9525" cap="flat" cmpd="sng" algn="ctr">
                       <a:solidFill>
-                        <a:srgbClr val="EDDED4"/>
+                        <a:srgbClr val="F6E2D5"/>
                       </a:solidFill>
                       <a:prstDash val="solid"/>
                     </a:lnB>
@@ -7207,7 +7494,7 @@
                       <a:r>
                         <a:rPr sz="1400" b="0">
                           <a:solidFill>
-                            <a:srgbClr val="2B2B2B"/>
+                            <a:srgbClr val="26231F"/>
                           </a:solidFill>
                         </a:rPr>
                         <a:t>□</a:t>
@@ -7217,25 +7504,25 @@
                   <a:tcPr anchor="ctr" marL="73152" marR="73152">
                     <a:lnL w="9525" cap="flat" cmpd="sng" algn="ctr">
                       <a:solidFill>
-                        <a:srgbClr val="EDDED4"/>
+                        <a:srgbClr val="F6E2D5"/>
                       </a:solidFill>
                       <a:prstDash val="solid"/>
                     </a:lnL>
                     <a:lnR w="9525" cap="flat" cmpd="sng" algn="ctr">
                       <a:solidFill>
-                        <a:srgbClr val="EDDED4"/>
+                        <a:srgbClr val="F6E2D5"/>
                       </a:solidFill>
                       <a:prstDash val="solid"/>
                     </a:lnR>
                     <a:lnT w="9525" cap="flat" cmpd="sng" algn="ctr">
                       <a:solidFill>
-                        <a:srgbClr val="EDDED4"/>
+                        <a:srgbClr val="F6E2D5"/>
                       </a:solidFill>
                       <a:prstDash val="solid"/>
                     </a:lnT>
                     <a:lnB w="9525" cap="flat" cmpd="sng" algn="ctr">
                       <a:solidFill>
-                        <a:srgbClr val="EDDED4"/>
+                        <a:srgbClr val="F6E2D5"/>
                       </a:solidFill>
                       <a:prstDash val="solid"/>
                     </a:lnB>
@@ -7255,7 +7542,7 @@
                       <a:r>
                         <a:rPr sz="1400" b="1">
                           <a:solidFill>
-                            <a:srgbClr val="37261A"/>
+                            <a:srgbClr val="493527"/>
                           </a:solidFill>
                         </a:rPr>
                         <a:t>상해</a:t>
@@ -7265,30 +7552,30 @@
                   <a:tcPr anchor="ctr" marL="73152" marR="73152">
                     <a:lnL w="9525" cap="flat" cmpd="sng" algn="ctr">
                       <a:solidFill>
-                        <a:srgbClr val="EDDED4"/>
+                        <a:srgbClr val="F6E2D5"/>
                       </a:solidFill>
                       <a:prstDash val="solid"/>
                     </a:lnL>
                     <a:lnR w="9525" cap="flat" cmpd="sng" algn="ctr">
                       <a:solidFill>
-                        <a:srgbClr val="EDDED4"/>
+                        <a:srgbClr val="F6E2D5"/>
                       </a:solidFill>
                       <a:prstDash val="solid"/>
                     </a:lnR>
                     <a:lnT w="9525" cap="flat" cmpd="sng" algn="ctr">
                       <a:solidFill>
-                        <a:srgbClr val="EDDED4"/>
+                        <a:srgbClr val="F6E2D5"/>
                       </a:solidFill>
                       <a:prstDash val="solid"/>
                     </a:lnT>
                     <a:lnB w="9525" cap="flat" cmpd="sng" algn="ctr">
                       <a:solidFill>
-                        <a:srgbClr val="EDDED4"/>
+                        <a:srgbClr val="F6E2D5"/>
                       </a:solidFill>
                       <a:prstDash val="solid"/>
                     </a:lnB>
                     <a:solidFill>
-                      <a:srgbClr val="EDDED4"/>
+                      <a:srgbClr val="F6E2D5"/>
                     </a:solidFill>
                   </a:tcPr>
                 </a:tc>
@@ -7301,7 +7588,7 @@
                       <a:r>
                         <a:rPr sz="1400" b="0">
                           <a:solidFill>
-                            <a:srgbClr val="2B2B2B"/>
+                            <a:srgbClr val="26231F"/>
                           </a:solidFill>
                         </a:rPr>
                         <a:t>□</a:t>
@@ -7311,30 +7598,30 @@
                   <a:tcPr anchor="ctr" marL="73152" marR="73152">
                     <a:lnL w="9525" cap="flat" cmpd="sng" algn="ctr">
                       <a:solidFill>
-                        <a:srgbClr val="EDDED4"/>
+                        <a:srgbClr val="F6E2D5"/>
                       </a:solidFill>
                       <a:prstDash val="solid"/>
                     </a:lnL>
                     <a:lnR w="9525" cap="flat" cmpd="sng" algn="ctr">
                       <a:solidFill>
-                        <a:srgbClr val="EDDED4"/>
+                        <a:srgbClr val="F6E2D5"/>
                       </a:solidFill>
                       <a:prstDash val="solid"/>
                     </a:lnR>
                     <a:lnT w="9525" cap="flat" cmpd="sng" algn="ctr">
                       <a:solidFill>
-                        <a:srgbClr val="EDDED4"/>
+                        <a:srgbClr val="F6E2D5"/>
                       </a:solidFill>
                       <a:prstDash val="solid"/>
                     </a:lnT>
                     <a:lnB w="9525" cap="flat" cmpd="sng" algn="ctr">
                       <a:solidFill>
-                        <a:srgbClr val="EDDED4"/>
+                        <a:srgbClr val="F6E2D5"/>
                       </a:solidFill>
                       <a:prstDash val="solid"/>
                     </a:lnB>
                     <a:solidFill>
-                      <a:srgbClr val="F8F4F1"/>
+                      <a:srgbClr val="FBF2EC"/>
                     </a:solidFill>
                   </a:tcPr>
                 </a:tc>
@@ -7347,7 +7634,7 @@
                       <a:r>
                         <a:rPr sz="1400" b="0">
                           <a:solidFill>
-                            <a:srgbClr val="2B2B2B"/>
+                            <a:srgbClr val="26231F"/>
                           </a:solidFill>
                         </a:rPr>
                         <a:t>□</a:t>
@@ -7357,30 +7644,30 @@
                   <a:tcPr anchor="ctr" marL="73152" marR="73152">
                     <a:lnL w="9525" cap="flat" cmpd="sng" algn="ctr">
                       <a:solidFill>
-                        <a:srgbClr val="EDDED4"/>
+                        <a:srgbClr val="F6E2D5"/>
                       </a:solidFill>
                       <a:prstDash val="solid"/>
                     </a:lnL>
                     <a:lnR w="9525" cap="flat" cmpd="sng" algn="ctr">
                       <a:solidFill>
-                        <a:srgbClr val="EDDED4"/>
+                        <a:srgbClr val="F6E2D5"/>
                       </a:solidFill>
                       <a:prstDash val="solid"/>
                     </a:lnR>
                     <a:lnT w="9525" cap="flat" cmpd="sng" algn="ctr">
                       <a:solidFill>
-                        <a:srgbClr val="EDDED4"/>
+                        <a:srgbClr val="F6E2D5"/>
                       </a:solidFill>
                       <a:prstDash val="solid"/>
                     </a:lnT>
                     <a:lnB w="9525" cap="flat" cmpd="sng" algn="ctr">
                       <a:solidFill>
-                        <a:srgbClr val="EDDED4"/>
+                        <a:srgbClr val="F6E2D5"/>
                       </a:solidFill>
                       <a:prstDash val="solid"/>
                     </a:lnB>
                     <a:solidFill>
-                      <a:srgbClr val="F8F4F1"/>
+                      <a:srgbClr val="FBF2EC"/>
                     </a:solidFill>
                   </a:tcPr>
                 </a:tc>
@@ -7393,7 +7680,7 @@
                       <a:r>
                         <a:rPr sz="1400" b="0">
                           <a:solidFill>
-                            <a:srgbClr val="2B2B2B"/>
+                            <a:srgbClr val="26231F"/>
                           </a:solidFill>
                         </a:rPr>
                         <a:t>□</a:t>
@@ -7403,30 +7690,30 @@
                   <a:tcPr anchor="ctr" marL="73152" marR="73152">
                     <a:lnL w="9525" cap="flat" cmpd="sng" algn="ctr">
                       <a:solidFill>
-                        <a:srgbClr val="EDDED4"/>
+                        <a:srgbClr val="F6E2D5"/>
                       </a:solidFill>
                       <a:prstDash val="solid"/>
                     </a:lnL>
                     <a:lnR w="9525" cap="flat" cmpd="sng" algn="ctr">
                       <a:solidFill>
-                        <a:srgbClr val="EDDED4"/>
+                        <a:srgbClr val="F6E2D5"/>
                       </a:solidFill>
                       <a:prstDash val="solid"/>
                     </a:lnR>
                     <a:lnT w="9525" cap="flat" cmpd="sng" algn="ctr">
                       <a:solidFill>
-                        <a:srgbClr val="EDDED4"/>
+                        <a:srgbClr val="F6E2D5"/>
                       </a:solidFill>
                       <a:prstDash val="solid"/>
                     </a:lnT>
                     <a:lnB w="9525" cap="flat" cmpd="sng" algn="ctr">
                       <a:solidFill>
-                        <a:srgbClr val="EDDED4"/>
+                        <a:srgbClr val="F6E2D5"/>
                       </a:solidFill>
                       <a:prstDash val="solid"/>
                     </a:lnB>
                     <a:solidFill>
-                      <a:srgbClr val="F8F4F1"/>
+                      <a:srgbClr val="FBF2EC"/>
                     </a:solidFill>
                   </a:tcPr>
                 </a:tc>
@@ -7441,7 +7728,7 @@
                       <a:r>
                         <a:rPr sz="1400" b="1">
                           <a:solidFill>
-                            <a:srgbClr val="37261A"/>
+                            <a:srgbClr val="493527"/>
                           </a:solidFill>
                         </a:rPr>
                         <a:t>실손의료</a:t>
@@ -7451,30 +7738,30 @@
                   <a:tcPr anchor="ctr" marL="73152" marR="73152">
                     <a:lnL w="9525" cap="flat" cmpd="sng" algn="ctr">
                       <a:solidFill>
-                        <a:srgbClr val="EDDED4"/>
+                        <a:srgbClr val="F6E2D5"/>
                       </a:solidFill>
                       <a:prstDash val="solid"/>
                     </a:lnL>
                     <a:lnR w="9525" cap="flat" cmpd="sng" algn="ctr">
                       <a:solidFill>
-                        <a:srgbClr val="EDDED4"/>
+                        <a:srgbClr val="F6E2D5"/>
                       </a:solidFill>
                       <a:prstDash val="solid"/>
                     </a:lnR>
                     <a:lnT w="9525" cap="flat" cmpd="sng" algn="ctr">
                       <a:solidFill>
-                        <a:srgbClr val="EDDED4"/>
+                        <a:srgbClr val="F6E2D5"/>
                       </a:solidFill>
                       <a:prstDash val="solid"/>
                     </a:lnT>
                     <a:lnB w="9525" cap="flat" cmpd="sng" algn="ctr">
                       <a:solidFill>
-                        <a:srgbClr val="EDDED4"/>
+                        <a:srgbClr val="F6E2D5"/>
                       </a:solidFill>
                       <a:prstDash val="solid"/>
                     </a:lnB>
                     <a:solidFill>
-                      <a:srgbClr val="EDDED4"/>
+                      <a:srgbClr val="F6E2D5"/>
                     </a:solidFill>
                   </a:tcPr>
                 </a:tc>
@@ -7487,7 +7774,7 @@
                       <a:r>
                         <a:rPr sz="1400" b="0">
                           <a:solidFill>
-                            <a:srgbClr val="2B2B2B"/>
+                            <a:srgbClr val="26231F"/>
                           </a:solidFill>
                         </a:rPr>
                         <a:t>□</a:t>
@@ -7497,25 +7784,25 @@
                   <a:tcPr anchor="ctr" marL="73152" marR="73152">
                     <a:lnL w="9525" cap="flat" cmpd="sng" algn="ctr">
                       <a:solidFill>
-                        <a:srgbClr val="EDDED4"/>
+                        <a:srgbClr val="F6E2D5"/>
                       </a:solidFill>
                       <a:prstDash val="solid"/>
                     </a:lnL>
                     <a:lnR w="9525" cap="flat" cmpd="sng" algn="ctr">
                       <a:solidFill>
-                        <a:srgbClr val="EDDED4"/>
+                        <a:srgbClr val="F6E2D5"/>
                       </a:solidFill>
                       <a:prstDash val="solid"/>
                     </a:lnR>
                     <a:lnT w="9525" cap="flat" cmpd="sng" algn="ctr">
                       <a:solidFill>
-                        <a:srgbClr val="EDDED4"/>
+                        <a:srgbClr val="F6E2D5"/>
                       </a:solidFill>
                       <a:prstDash val="solid"/>
                     </a:lnT>
                     <a:lnB w="9525" cap="flat" cmpd="sng" algn="ctr">
                       <a:solidFill>
-                        <a:srgbClr val="EDDED4"/>
+                        <a:srgbClr val="F6E2D5"/>
                       </a:solidFill>
                       <a:prstDash val="solid"/>
                     </a:lnB>
@@ -7533,7 +7820,7 @@
                       <a:r>
                         <a:rPr sz="1400" b="0">
                           <a:solidFill>
-                            <a:srgbClr val="2B2B2B"/>
+                            <a:srgbClr val="26231F"/>
                           </a:solidFill>
                         </a:rPr>
                         <a:t>□</a:t>
@@ -7543,25 +7830,25 @@
                   <a:tcPr anchor="ctr" marL="73152" marR="73152">
                     <a:lnL w="9525" cap="flat" cmpd="sng" algn="ctr">
                       <a:solidFill>
-                        <a:srgbClr val="EDDED4"/>
+                        <a:srgbClr val="F6E2D5"/>
                       </a:solidFill>
                       <a:prstDash val="solid"/>
                     </a:lnL>
                     <a:lnR w="9525" cap="flat" cmpd="sng" algn="ctr">
                       <a:solidFill>
-                        <a:srgbClr val="EDDED4"/>
+                        <a:srgbClr val="F6E2D5"/>
                       </a:solidFill>
                       <a:prstDash val="solid"/>
                     </a:lnR>
                     <a:lnT w="9525" cap="flat" cmpd="sng" algn="ctr">
                       <a:solidFill>
-                        <a:srgbClr val="EDDED4"/>
+                        <a:srgbClr val="F6E2D5"/>
                       </a:solidFill>
                       <a:prstDash val="solid"/>
                     </a:lnT>
                     <a:lnB w="9525" cap="flat" cmpd="sng" algn="ctr">
                       <a:solidFill>
-                        <a:srgbClr val="EDDED4"/>
+                        <a:srgbClr val="F6E2D5"/>
                       </a:solidFill>
                       <a:prstDash val="solid"/>
                     </a:lnB>
@@ -7579,7 +7866,7 @@
                       <a:r>
                         <a:rPr sz="1400" b="0">
                           <a:solidFill>
-                            <a:srgbClr val="2B2B2B"/>
+                            <a:srgbClr val="26231F"/>
                           </a:solidFill>
                         </a:rPr>
                         <a:t>□</a:t>
@@ -7589,25 +7876,25 @@
                   <a:tcPr anchor="ctr" marL="73152" marR="73152">
                     <a:lnL w="9525" cap="flat" cmpd="sng" algn="ctr">
                       <a:solidFill>
-                        <a:srgbClr val="EDDED4"/>
+                        <a:srgbClr val="F6E2D5"/>
                       </a:solidFill>
                       <a:prstDash val="solid"/>
                     </a:lnL>
                     <a:lnR w="9525" cap="flat" cmpd="sng" algn="ctr">
                       <a:solidFill>
-                        <a:srgbClr val="EDDED4"/>
+                        <a:srgbClr val="F6E2D5"/>
                       </a:solidFill>
                       <a:prstDash val="solid"/>
                     </a:lnR>
                     <a:lnT w="9525" cap="flat" cmpd="sng" algn="ctr">
                       <a:solidFill>
-                        <a:srgbClr val="EDDED4"/>
+                        <a:srgbClr val="F6E2D5"/>
                       </a:solidFill>
                       <a:prstDash val="solid"/>
                     </a:lnT>
                     <a:lnB w="9525" cap="flat" cmpd="sng" algn="ctr">
                       <a:solidFill>
-                        <a:srgbClr val="EDDED4"/>
+                        <a:srgbClr val="F6E2D5"/>
                       </a:solidFill>
                       <a:prstDash val="solid"/>
                     </a:lnB>
@@ -7627,7 +7914,7 @@
                       <a:r>
                         <a:rPr sz="1400" b="1">
                           <a:solidFill>
-                            <a:srgbClr val="37261A"/>
+                            <a:srgbClr val="493527"/>
                           </a:solidFill>
                         </a:rPr>
                         <a:t>연금·노후자금</a:t>
@@ -7637,30 +7924,30 @@
                   <a:tcPr anchor="ctr" marL="73152" marR="73152">
                     <a:lnL w="9525" cap="flat" cmpd="sng" algn="ctr">
                       <a:solidFill>
-                        <a:srgbClr val="EDDED4"/>
+                        <a:srgbClr val="F6E2D5"/>
                       </a:solidFill>
                       <a:prstDash val="solid"/>
                     </a:lnL>
                     <a:lnR w="9525" cap="flat" cmpd="sng" algn="ctr">
                       <a:solidFill>
-                        <a:srgbClr val="EDDED4"/>
+                        <a:srgbClr val="F6E2D5"/>
                       </a:solidFill>
                       <a:prstDash val="solid"/>
                     </a:lnR>
                     <a:lnT w="9525" cap="flat" cmpd="sng" algn="ctr">
                       <a:solidFill>
-                        <a:srgbClr val="EDDED4"/>
+                        <a:srgbClr val="F6E2D5"/>
                       </a:solidFill>
                       <a:prstDash val="solid"/>
                     </a:lnT>
                     <a:lnB w="9525" cap="flat" cmpd="sng" algn="ctr">
                       <a:solidFill>
-                        <a:srgbClr val="EDDED4"/>
+                        <a:srgbClr val="F6E2D5"/>
                       </a:solidFill>
                       <a:prstDash val="solid"/>
                     </a:lnB>
                     <a:solidFill>
-                      <a:srgbClr val="EDDED4"/>
+                      <a:srgbClr val="F6E2D5"/>
                     </a:solidFill>
                   </a:tcPr>
                 </a:tc>
@@ -7673,7 +7960,7 @@
                       <a:r>
                         <a:rPr sz="1400" b="0">
                           <a:solidFill>
-                            <a:srgbClr val="2B2B2B"/>
+                            <a:srgbClr val="26231F"/>
                           </a:solidFill>
                         </a:rPr>
                         <a:t>□</a:t>
@@ -7683,30 +7970,30 @@
                   <a:tcPr anchor="ctr" marL="73152" marR="73152">
                     <a:lnL w="9525" cap="flat" cmpd="sng" algn="ctr">
                       <a:solidFill>
-                        <a:srgbClr val="EDDED4"/>
+                        <a:srgbClr val="F6E2D5"/>
                       </a:solidFill>
                       <a:prstDash val="solid"/>
                     </a:lnL>
                     <a:lnR w="9525" cap="flat" cmpd="sng" algn="ctr">
                       <a:solidFill>
-                        <a:srgbClr val="EDDED4"/>
+                        <a:srgbClr val="F6E2D5"/>
                       </a:solidFill>
                       <a:prstDash val="solid"/>
                     </a:lnR>
                     <a:lnT w="9525" cap="flat" cmpd="sng" algn="ctr">
                       <a:solidFill>
-                        <a:srgbClr val="EDDED4"/>
+                        <a:srgbClr val="F6E2D5"/>
                       </a:solidFill>
                       <a:prstDash val="solid"/>
                     </a:lnT>
                     <a:lnB w="9525" cap="flat" cmpd="sng" algn="ctr">
                       <a:solidFill>
-                        <a:srgbClr val="EDDED4"/>
+                        <a:srgbClr val="F6E2D5"/>
                       </a:solidFill>
                       <a:prstDash val="solid"/>
                     </a:lnB>
                     <a:solidFill>
-                      <a:srgbClr val="F8F4F1"/>
+                      <a:srgbClr val="FBF2EC"/>
                     </a:solidFill>
                   </a:tcPr>
                 </a:tc>
@@ -7719,7 +8006,7 @@
                       <a:r>
                         <a:rPr sz="1400" b="0">
                           <a:solidFill>
-                            <a:srgbClr val="2B2B2B"/>
+                            <a:srgbClr val="26231F"/>
                           </a:solidFill>
                         </a:rPr>
                         <a:t>□</a:t>
@@ -7729,30 +8016,30 @@
                   <a:tcPr anchor="ctr" marL="73152" marR="73152">
                     <a:lnL w="9525" cap="flat" cmpd="sng" algn="ctr">
                       <a:solidFill>
-                        <a:srgbClr val="EDDED4"/>
+                        <a:srgbClr val="F6E2D5"/>
                       </a:solidFill>
                       <a:prstDash val="solid"/>
                     </a:lnL>
                     <a:lnR w="9525" cap="flat" cmpd="sng" algn="ctr">
                       <a:solidFill>
-                        <a:srgbClr val="EDDED4"/>
+                        <a:srgbClr val="F6E2D5"/>
                       </a:solidFill>
                       <a:prstDash val="solid"/>
                     </a:lnR>
                     <a:lnT w="9525" cap="flat" cmpd="sng" algn="ctr">
                       <a:solidFill>
-                        <a:srgbClr val="EDDED4"/>
+                        <a:srgbClr val="F6E2D5"/>
                       </a:solidFill>
                       <a:prstDash val="solid"/>
                     </a:lnT>
                     <a:lnB w="9525" cap="flat" cmpd="sng" algn="ctr">
                       <a:solidFill>
-                        <a:srgbClr val="EDDED4"/>
+                        <a:srgbClr val="F6E2D5"/>
                       </a:solidFill>
                       <a:prstDash val="solid"/>
                     </a:lnB>
                     <a:solidFill>
-                      <a:srgbClr val="F8F4F1"/>
+                      <a:srgbClr val="FBF2EC"/>
                     </a:solidFill>
                   </a:tcPr>
                 </a:tc>
@@ -7765,7 +8052,7 @@
                       <a:r>
                         <a:rPr sz="1400" b="0">
                           <a:solidFill>
-                            <a:srgbClr val="2B2B2B"/>
+                            <a:srgbClr val="26231F"/>
                           </a:solidFill>
                         </a:rPr>
                         <a:t>□</a:t>
@@ -7775,30 +8062,30 @@
                   <a:tcPr anchor="ctr" marL="73152" marR="73152">
                     <a:lnL w="9525" cap="flat" cmpd="sng" algn="ctr">
                       <a:solidFill>
-                        <a:srgbClr val="EDDED4"/>
+                        <a:srgbClr val="F6E2D5"/>
                       </a:solidFill>
                       <a:prstDash val="solid"/>
                     </a:lnL>
                     <a:lnR w="9525" cap="flat" cmpd="sng" algn="ctr">
                       <a:solidFill>
-                        <a:srgbClr val="EDDED4"/>
+                        <a:srgbClr val="F6E2D5"/>
                       </a:solidFill>
                       <a:prstDash val="solid"/>
                     </a:lnR>
                     <a:lnT w="9525" cap="flat" cmpd="sng" algn="ctr">
                       <a:solidFill>
-                        <a:srgbClr val="EDDED4"/>
+                        <a:srgbClr val="F6E2D5"/>
                       </a:solidFill>
                       <a:prstDash val="solid"/>
                     </a:lnT>
                     <a:lnB w="9525" cap="flat" cmpd="sng" algn="ctr">
                       <a:solidFill>
-                        <a:srgbClr val="EDDED4"/>
+                        <a:srgbClr val="F6E2D5"/>
                       </a:solidFill>
                       <a:prstDash val="solid"/>
                     </a:lnB>
                     <a:solidFill>
-                      <a:srgbClr val="F8F4F1"/>
+                      <a:srgbClr val="FBF2EC"/>
                     </a:solidFill>
                   </a:tcPr>
                 </a:tc>
@@ -7821,7 +8108,7 @@
     <p:bg>
       <p:bgPr>
         <a:solidFill>
-          <a:srgbClr val="FFFFFF"/>
+          <a:srgbClr val="FBF2EC"/>
         </a:solidFill>
         <a:effectLst/>
       </p:bgPr>
@@ -7841,14 +8128,83 @@
         </p:nvSpPr>
         <p:spPr>
           <a:xfrm>
-            <a:off x="0" y="384048"/>
-            <a:ext cx="9509522" cy="896112"/>
-          </a:xfrm>
-          <a:prstGeom prst="homePlate">
+            <a:off x="640080" y="566928"/>
+            <a:ext cx="64008" cy="868680"/>
+          </a:xfrm>
+          <a:prstGeom prst="roundRect">
+            <a:avLst>
+              <a:gd name="adj" fmla="val 50000"/>
+            </a:avLst>
+          </a:prstGeom>
+          <a:solidFill>
+            <a:srgbClr val="D89F79"/>
+          </a:solidFill>
+          <a:ln>
+            <a:noFill/>
+          </a:ln>
+        </p:spPr>
+        <p:txBody>
+          <a:bodyPr rtlCol="0" anchor="ctr"/>
+          <a:lstStyle/>
+          <a:p>
+            <a:pPr algn="ctr"/>
+          </a:p>
+        </p:txBody>
+      </p:sp>
+      <p:sp>
+        <p:nvSpPr>
+          <p:cNvPr id="4" name="상단 라벨"/>
+          <p:cNvSpPr txBox="1"/>
+          <p:nvPr/>
+        </p:nvSpPr>
+        <p:spPr>
+          <a:xfrm>
+            <a:off x="868680" y="274320"/>
+            <a:ext cx="5486400" cy="274320"/>
+          </a:xfrm>
+          <a:prstGeom prst="rect">
+            <a:avLst/>
+          </a:prstGeom>
+          <a:noFill/>
+        </p:spPr>
+        <p:txBody>
+          <a:bodyPr wrap="square" lIns="54864" rIns="54864" tIns="27432" bIns="27432" anchor="ctr">
+            <a:noAutofit/>
+          </a:bodyPr>
+          <a:lstStyle/>
+          <a:p>
+            <a:pPr algn="l">
+              <a:lnSpc>
+                <a:spcPct val="115000"/>
+              </a:lnSpc>
+            </a:pPr>
+            <a:r>
+              <a:rPr sz="900" b="1" i="0" spc="250">
+                <a:solidFill>
+                  <a:srgbClr val="8E8780"/>
+                </a:solidFill>
+              </a:rPr>
+              <a:t>INSURANCE CHECK</a:t>
+            </a:r>
+          </a:p>
+        </p:txBody>
+      </p:sp>
+      <p:sp>
+        <p:nvSpPr>
+          <p:cNvPr id="5" name="포인트"/>
+          <p:cNvSpPr/>
+          <p:nvPr/>
+        </p:nvSpPr>
+        <p:spPr>
+          <a:xfrm>
+            <a:off x="11167567" y="667512"/>
+            <a:ext cx="310896" cy="310896"/>
+          </a:xfrm>
+          <a:prstGeom prst="moon">
             <a:avLst/>
           </a:prstGeom>
           <a:solidFill>
-            <a:srgbClr val="765037"/>
+            <a:srgbClr val="EBC6AD"/>
           </a:solidFill>
           <a:ln>
             <a:noFill/>
@@ -7874,8 +8230,8 @@
         </p:nvSpPr>
         <p:spPr>
           <a:xfrm>
-            <a:off x="640080" y="411480"/>
-            <a:ext cx="8412242" cy="822960"/>
+            <a:off x="868680" y="566928"/>
+            <a:ext cx="9448495" cy="868680"/>
           </a:xfrm>
         </p:spPr>
         <p:txBody>
@@ -7892,7 +8248,7 @@
             <a:r>
               <a:rPr sz="3000" b="1" i="0">
                 <a:solidFill>
-                  <a:srgbClr val="FFFFFF"/>
+                  <a:srgbClr val="26231F"/>
                 </a:solidFill>
               </a:rPr>
               <a:t>월 보험료 한눈에</a:t>
@@ -7902,27 +8258,25 @@
       </p:sp>
       <p:sp>
         <p:nvSpPr>
-          <p:cNvPr id="4" name="카드 1"/>
+          <p:cNvPr id="6" name="카드 1"/>
           <p:cNvSpPr/>
           <p:nvPr/>
         </p:nvSpPr>
         <p:spPr>
           <a:xfrm>
-            <a:off x="640080" y="1645920"/>
+            <a:off x="640080" y="1783080"/>
             <a:ext cx="3484778" cy="2926080"/>
           </a:xfrm>
           <a:prstGeom prst="roundRect">
             <a:avLst>
-              <a:gd name="adj" fmla="val 8000"/>
+              <a:gd name="adj" fmla="val 7000"/>
             </a:avLst>
           </a:prstGeom>
           <a:solidFill>
-            <a:srgbClr val="F8F4F1"/>
+            <a:srgbClr val="FBF2EC"/>
           </a:solidFill>
-          <a:ln w="15875">
-            <a:solidFill>
-              <a:srgbClr val="EDDED4"/>
-            </a:solidFill>
+          <a:ln>
+            <a:noFill/>
           </a:ln>
         </p:spPr>
         <p:txBody>
@@ -7935,23 +8289,23 @@
       </p:sp>
       <p:sp>
         <p:nvSpPr>
-          <p:cNvPr id="5" name="번호 1"/>
+          <p:cNvPr id="7" name="번호 1"/>
           <p:cNvSpPr/>
           <p:nvPr/>
         </p:nvSpPr>
         <p:spPr>
           <a:xfrm>
-            <a:off x="822959" y="1828800"/>
+            <a:off x="822959" y="1965960"/>
             <a:ext cx="457200" cy="457200"/>
           </a:xfrm>
           <a:prstGeom prst="ellipse">
             <a:avLst/>
           </a:prstGeom>
-          <a:solidFill>
-            <a:srgbClr val="765037"/>
-          </a:solidFill>
-          <a:ln>
-            <a:noFill/>
+          <a:noFill/>
+          <a:ln w="19050">
+            <a:solidFill>
+              <a:srgbClr val="D89F79"/>
+            </a:solidFill>
           </a:ln>
         </p:spPr>
         <p:txBody>
@@ -7968,7 +8322,7 @@
             <a:r>
               <a:rPr sz="1600" b="1" i="0">
                 <a:solidFill>
-                  <a:srgbClr val="FFFFFF"/>
+                  <a:srgbClr val="493527"/>
                 </a:solidFill>
               </a:rPr>
               <a:t>1</a:t>
@@ -7978,13 +8332,13 @@
       </p:sp>
       <p:sp>
         <p:nvSpPr>
-          <p:cNvPr id="6" name="TextBox 5"/>
+          <p:cNvPr id="8" name="TextBox 7"/>
           <p:cNvSpPr txBox="1"/>
           <p:nvPr/>
         </p:nvSpPr>
         <p:spPr>
           <a:xfrm>
-            <a:off x="777240" y="2423160"/>
+            <a:off x="777240" y="2560320"/>
             <a:ext cx="3210458" cy="640080"/>
           </a:xfrm>
           <a:prstGeom prst="rect">
@@ -8006,7 +8360,7 @@
             <a:r>
               <a:rPr sz="1700" b="1" i="0">
                 <a:solidFill>
-                  <a:srgbClr val="37261A"/>
+                  <a:srgbClr val="493527"/>
                 </a:solidFill>
               </a:rPr>
               <a:t>월 보험료 합계</a:t>
@@ -8016,13 +8370,13 @@
       </p:sp>
       <p:sp>
         <p:nvSpPr>
-          <p:cNvPr id="7" name="TextBox 6"/>
+          <p:cNvPr id="9" name="TextBox 8"/>
           <p:cNvSpPr txBox="1"/>
           <p:nvPr/>
         </p:nvSpPr>
         <p:spPr>
           <a:xfrm>
-            <a:off x="777240" y="3108960"/>
+            <a:off x="777240" y="3246120"/>
             <a:ext cx="3210458" cy="1325880"/>
           </a:xfrm>
           <a:prstGeom prst="rect">
@@ -8044,7 +8398,7 @@
             <a:r>
               <a:rPr sz="3000" b="0" i="0">
                 <a:solidFill>
-                  <a:srgbClr val="2B2B2B"/>
+                  <a:srgbClr val="26231F"/>
                 </a:solidFill>
               </a:rPr>
               <a:t>0원</a:t>
@@ -8054,27 +8408,25 @@
       </p:sp>
       <p:sp>
         <p:nvSpPr>
-          <p:cNvPr id="8" name="카드 2"/>
+          <p:cNvPr id="10" name="카드 2"/>
           <p:cNvSpPr/>
           <p:nvPr/>
         </p:nvSpPr>
         <p:spPr>
           <a:xfrm>
-            <a:off x="4353458" y="1645920"/>
+            <a:off x="4353458" y="1783080"/>
             <a:ext cx="3484778" cy="2926080"/>
           </a:xfrm>
           <a:prstGeom prst="roundRect">
             <a:avLst>
-              <a:gd name="adj" fmla="val 8000"/>
+              <a:gd name="adj" fmla="val 7000"/>
             </a:avLst>
           </a:prstGeom>
           <a:solidFill>
-            <a:srgbClr val="F8F4F1"/>
+            <a:srgbClr val="FBF2EC"/>
           </a:solidFill>
-          <a:ln w="15875">
-            <a:solidFill>
-              <a:srgbClr val="EDDED4"/>
-            </a:solidFill>
+          <a:ln>
+            <a:noFill/>
           </a:ln>
         </p:spPr>
         <p:txBody>
@@ -8087,23 +8439,23 @@
       </p:sp>
       <p:sp>
         <p:nvSpPr>
-          <p:cNvPr id="9" name="번호 2"/>
+          <p:cNvPr id="11" name="번호 2"/>
           <p:cNvSpPr/>
           <p:nvPr/>
         </p:nvSpPr>
         <p:spPr>
           <a:xfrm>
-            <a:off x="4536338" y="1828800"/>
+            <a:off x="4536338" y="1965960"/>
             <a:ext cx="457200" cy="457200"/>
           </a:xfrm>
           <a:prstGeom prst="ellipse">
             <a:avLst/>
           </a:prstGeom>
-          <a:solidFill>
-            <a:srgbClr val="765037"/>
-          </a:solidFill>
-          <a:ln>
-            <a:noFill/>
+          <a:noFill/>
+          <a:ln w="19050">
+            <a:solidFill>
+              <a:srgbClr val="D89F79"/>
+            </a:solidFill>
           </a:ln>
         </p:spPr>
         <p:txBody>
@@ -8120,7 +8472,7 @@
             <a:r>
               <a:rPr sz="1600" b="1" i="0">
                 <a:solidFill>
-                  <a:srgbClr val="FFFFFF"/>
+                  <a:srgbClr val="493527"/>
                 </a:solidFill>
               </a:rPr>
               <a:t>2</a:t>
@@ -8130,13 +8482,13 @@
       </p:sp>
       <p:sp>
         <p:nvSpPr>
-          <p:cNvPr id="10" name="TextBox 9"/>
+          <p:cNvPr id="12" name="TextBox 11"/>
           <p:cNvSpPr txBox="1"/>
           <p:nvPr/>
         </p:nvSpPr>
         <p:spPr>
           <a:xfrm>
-            <a:off x="4490618" y="2423160"/>
+            <a:off x="4490618" y="2560320"/>
             <a:ext cx="3210458" cy="640080"/>
           </a:xfrm>
           <a:prstGeom prst="rect">
@@ -8158,7 +8510,7 @@
             <a:r>
               <a:rPr sz="1700" b="1" i="0">
                 <a:solidFill>
-                  <a:srgbClr val="37261A"/>
+                  <a:srgbClr val="493527"/>
                 </a:solidFill>
               </a:rPr>
               <a:t>연 보험료 합계</a:t>
@@ -8168,13 +8520,13 @@
       </p:sp>
       <p:sp>
         <p:nvSpPr>
-          <p:cNvPr id="11" name="TextBox 10"/>
+          <p:cNvPr id="13" name="TextBox 12"/>
           <p:cNvSpPr txBox="1"/>
           <p:nvPr/>
         </p:nvSpPr>
         <p:spPr>
           <a:xfrm>
-            <a:off x="4490618" y="3108960"/>
+            <a:off x="4490618" y="3246120"/>
             <a:ext cx="3210458" cy="1325880"/>
           </a:xfrm>
           <a:prstGeom prst="rect">
@@ -8196,7 +8548,7 @@
             <a:r>
               <a:rPr sz="3000" b="0" i="0">
                 <a:solidFill>
-                  <a:srgbClr val="2B2B2B"/>
+                  <a:srgbClr val="26231F"/>
                 </a:solidFill>
               </a:rPr>
               <a:t>0원</a:t>
@@ -8206,27 +8558,25 @@
       </p:sp>
       <p:sp>
         <p:nvSpPr>
-          <p:cNvPr id="12" name="카드 3"/>
+          <p:cNvPr id="14" name="카드 3"/>
           <p:cNvSpPr/>
           <p:nvPr/>
         </p:nvSpPr>
         <p:spPr>
           <a:xfrm>
-            <a:off x="8066836" y="1645920"/>
+            <a:off x="8066836" y="1783080"/>
             <a:ext cx="3484778" cy="2926080"/>
           </a:xfrm>
           <a:prstGeom prst="roundRect">
             <a:avLst>
-              <a:gd name="adj" fmla="val 8000"/>
+              <a:gd name="adj" fmla="val 7000"/>
             </a:avLst>
           </a:prstGeom>
           <a:solidFill>
-            <a:srgbClr val="F8F4F1"/>
+            <a:srgbClr val="FBF2EC"/>
           </a:solidFill>
-          <a:ln w="15875">
-            <a:solidFill>
-              <a:srgbClr val="EDDED4"/>
-            </a:solidFill>
+          <a:ln>
+            <a:noFill/>
           </a:ln>
         </p:spPr>
         <p:txBody>
@@ -8239,23 +8589,23 @@
       </p:sp>
       <p:sp>
         <p:nvSpPr>
-          <p:cNvPr id="13" name="번호 3"/>
+          <p:cNvPr id="15" name="번호 3"/>
           <p:cNvSpPr/>
           <p:nvPr/>
         </p:nvSpPr>
         <p:spPr>
           <a:xfrm>
-            <a:off x="8249716" y="1828800"/>
+            <a:off x="8249716" y="1965960"/>
             <a:ext cx="457200" cy="457200"/>
           </a:xfrm>
           <a:prstGeom prst="ellipse">
             <a:avLst/>
           </a:prstGeom>
-          <a:solidFill>
-            <a:srgbClr val="765037"/>
-          </a:solidFill>
-          <a:ln>
-            <a:noFill/>
+          <a:noFill/>
+          <a:ln w="19050">
+            <a:solidFill>
+              <a:srgbClr val="D89F79"/>
+            </a:solidFill>
           </a:ln>
         </p:spPr>
         <p:txBody>
@@ -8272,7 +8622,7 @@
             <a:r>
               <a:rPr sz="1600" b="1" i="0">
                 <a:solidFill>
-                  <a:srgbClr val="FFFFFF"/>
+                  <a:srgbClr val="493527"/>
                 </a:solidFill>
               </a:rPr>
               <a:t>3</a:t>
@@ -8282,13 +8632,13 @@
       </p:sp>
       <p:sp>
         <p:nvSpPr>
-          <p:cNvPr id="14" name="TextBox 13"/>
+          <p:cNvPr id="16" name="TextBox 15"/>
           <p:cNvSpPr txBox="1"/>
           <p:nvPr/>
         </p:nvSpPr>
         <p:spPr>
           <a:xfrm>
-            <a:off x="8203996" y="2423160"/>
+            <a:off x="8203996" y="2560320"/>
             <a:ext cx="3210458" cy="640080"/>
           </a:xfrm>
           <a:prstGeom prst="rect">
@@ -8310,7 +8660,7 @@
             <a:r>
               <a:rPr sz="1700" b="1" i="0">
                 <a:solidFill>
-                  <a:srgbClr val="37261A"/>
+                  <a:srgbClr val="493527"/>
                 </a:solidFill>
               </a:rPr>
               <a:t>월 소득 대비</a:t>
@@ -8320,13 +8670,13 @@
       </p:sp>
       <p:sp>
         <p:nvSpPr>
-          <p:cNvPr id="15" name="TextBox 14"/>
+          <p:cNvPr id="17" name="TextBox 16"/>
           <p:cNvSpPr txBox="1"/>
           <p:nvPr/>
         </p:nvSpPr>
         <p:spPr>
           <a:xfrm>
-            <a:off x="8203996" y="3108960"/>
+            <a:off x="8203996" y="3246120"/>
             <a:ext cx="3210458" cy="1325880"/>
           </a:xfrm>
           <a:prstGeom prst="rect">
@@ -8348,7 +8698,7 @@
             <a:r>
               <a:rPr sz="3000" b="0" i="0">
                 <a:solidFill>
-                  <a:srgbClr val="2B2B2B"/>
+                  <a:srgbClr val="26231F"/>
                 </a:solidFill>
               </a:rPr>
               <a:t>0 %</a:t>
@@ -8358,13 +8708,13 @@
       </p:sp>
       <p:sp>
         <p:nvSpPr>
-          <p:cNvPr id="16" name="안내"/>
+          <p:cNvPr id="18" name="안내"/>
           <p:cNvSpPr txBox="1"/>
           <p:nvPr/>
         </p:nvSpPr>
         <p:spPr>
           <a:xfrm>
-            <a:off x="640080" y="4754880"/>
+            <a:off x="640080" y="4892040"/>
             <a:ext cx="10911535" cy="365760"/>
           </a:xfrm>
           <a:prstGeom prst="rect">
@@ -8408,7 +8758,7 @@
     <p:bg>
       <p:bgPr>
         <a:solidFill>
-          <a:srgbClr val="FFFFFF"/>
+          <a:srgbClr val="FBF2EC"/>
         </a:solidFill>
         <a:effectLst/>
       </p:bgPr>
@@ -8428,14 +8778,83 @@
         </p:nvSpPr>
         <p:spPr>
           <a:xfrm>
-            <a:off x="0" y="384048"/>
-            <a:ext cx="9509522" cy="896112"/>
-          </a:xfrm>
-          <a:prstGeom prst="homePlate">
+            <a:off x="640080" y="566928"/>
+            <a:ext cx="64008" cy="868680"/>
+          </a:xfrm>
+          <a:prstGeom prst="roundRect">
+            <a:avLst>
+              <a:gd name="adj" fmla="val 50000"/>
+            </a:avLst>
+          </a:prstGeom>
+          <a:solidFill>
+            <a:srgbClr val="D89F79"/>
+          </a:solidFill>
+          <a:ln>
+            <a:noFill/>
+          </a:ln>
+        </p:spPr>
+        <p:txBody>
+          <a:bodyPr rtlCol="0" anchor="ctr"/>
+          <a:lstStyle/>
+          <a:p>
+            <a:pPr algn="ctr"/>
+          </a:p>
+        </p:txBody>
+      </p:sp>
+      <p:sp>
+        <p:nvSpPr>
+          <p:cNvPr id="4" name="상단 라벨"/>
+          <p:cNvSpPr txBox="1"/>
+          <p:nvPr/>
+        </p:nvSpPr>
+        <p:spPr>
+          <a:xfrm>
+            <a:off x="868680" y="274320"/>
+            <a:ext cx="5486400" cy="274320"/>
+          </a:xfrm>
+          <a:prstGeom prst="rect">
+            <a:avLst/>
+          </a:prstGeom>
+          <a:noFill/>
+        </p:spPr>
+        <p:txBody>
+          <a:bodyPr wrap="square" lIns="54864" rIns="54864" tIns="27432" bIns="27432" anchor="ctr">
+            <a:noAutofit/>
+          </a:bodyPr>
+          <a:lstStyle/>
+          <a:p>
+            <a:pPr algn="l">
+              <a:lnSpc>
+                <a:spcPct val="115000"/>
+              </a:lnSpc>
+            </a:pPr>
+            <a:r>
+              <a:rPr sz="900" b="1" i="0" spc="250">
+                <a:solidFill>
+                  <a:srgbClr val="8E8780"/>
+                </a:solidFill>
+              </a:rPr>
+              <a:t>INSURANCE CHECK</a:t>
+            </a:r>
+          </a:p>
+        </p:txBody>
+      </p:sp>
+      <p:sp>
+        <p:nvSpPr>
+          <p:cNvPr id="5" name="포인트"/>
+          <p:cNvSpPr/>
+          <p:nvPr/>
+        </p:nvSpPr>
+        <p:spPr>
+          <a:xfrm>
+            <a:off x="11167567" y="667512"/>
+            <a:ext cx="310896" cy="310896"/>
+          </a:xfrm>
+          <a:prstGeom prst="moon">
             <a:avLst/>
           </a:prstGeom>
           <a:solidFill>
-            <a:srgbClr val="765037"/>
+            <a:srgbClr val="EBC6AD"/>
           </a:solidFill>
           <a:ln>
             <a:noFill/>
@@ -8461,8 +8880,8 @@
         </p:nvSpPr>
         <p:spPr>
           <a:xfrm>
-            <a:off x="640080" y="411480"/>
-            <a:ext cx="8412242" cy="822960"/>
+            <a:off x="868680" y="566928"/>
+            <a:ext cx="9448495" cy="868680"/>
           </a:xfrm>
         </p:spPr>
         <p:txBody>
@@ -8479,7 +8898,7 @@
             <a:r>
               <a:rPr sz="3000" b="1" i="0">
                 <a:solidFill>
-                  <a:srgbClr val="FFFFFF"/>
+                  <a:srgbClr val="26231F"/>
                 </a:solidFill>
               </a:rPr>
               <a:t>점검 메모와 다음 할 일</a:t>
@@ -8489,27 +8908,25 @@
       </p:sp>
       <p:sp>
         <p:nvSpPr>
-          <p:cNvPr id="4" name="카드 1"/>
+          <p:cNvPr id="6" name="카드 1"/>
           <p:cNvSpPr/>
           <p:nvPr/>
         </p:nvSpPr>
         <p:spPr>
           <a:xfrm>
-            <a:off x="640080" y="1645920"/>
-            <a:ext cx="3484778" cy="4114800"/>
+            <a:off x="640080" y="1783080"/>
+            <a:ext cx="3484778" cy="3931920"/>
           </a:xfrm>
           <a:prstGeom prst="roundRect">
             <a:avLst>
-              <a:gd name="adj" fmla="val 8000"/>
+              <a:gd name="adj" fmla="val 7000"/>
             </a:avLst>
           </a:prstGeom>
           <a:solidFill>
-            <a:srgbClr val="F8F4F1"/>
+            <a:srgbClr val="FBF2EC"/>
           </a:solidFill>
-          <a:ln w="15875">
-            <a:solidFill>
-              <a:srgbClr val="EDDED4"/>
-            </a:solidFill>
+          <a:ln>
+            <a:noFill/>
           </a:ln>
         </p:spPr>
         <p:txBody>
@@ -8522,23 +8939,23 @@
       </p:sp>
       <p:sp>
         <p:nvSpPr>
-          <p:cNvPr id="5" name="번호 1"/>
+          <p:cNvPr id="7" name="번호 1"/>
           <p:cNvSpPr/>
           <p:nvPr/>
         </p:nvSpPr>
         <p:spPr>
           <a:xfrm>
-            <a:off x="822959" y="1828800"/>
+            <a:off x="822959" y="1965960"/>
             <a:ext cx="457200" cy="457200"/>
           </a:xfrm>
           <a:prstGeom prst="ellipse">
             <a:avLst/>
           </a:prstGeom>
-          <a:solidFill>
-            <a:srgbClr val="765037"/>
-          </a:solidFill>
-          <a:ln>
-            <a:noFill/>
+          <a:noFill/>
+          <a:ln w="19050">
+            <a:solidFill>
+              <a:srgbClr val="D89F79"/>
+            </a:solidFill>
           </a:ln>
         </p:spPr>
         <p:txBody>
@@ -8555,7 +8972,7 @@
             <a:r>
               <a:rPr sz="1600" b="1" i="0">
                 <a:solidFill>
-                  <a:srgbClr val="FFFFFF"/>
+                  <a:srgbClr val="493527"/>
                 </a:solidFill>
               </a:rPr>
               <a:t>1</a:t>
@@ -8565,13 +8982,13 @@
       </p:sp>
       <p:sp>
         <p:nvSpPr>
-          <p:cNvPr id="6" name="TextBox 5"/>
+          <p:cNvPr id="8" name="TextBox 7"/>
           <p:cNvSpPr txBox="1"/>
           <p:nvPr/>
         </p:nvSpPr>
         <p:spPr>
           <a:xfrm>
-            <a:off x="777240" y="2423160"/>
+            <a:off x="777240" y="2560320"/>
             <a:ext cx="3210458" cy="640080"/>
           </a:xfrm>
           <a:prstGeom prst="rect">
@@ -8593,7 +9010,7 @@
             <a:r>
               <a:rPr sz="1800" b="1" i="0">
                 <a:solidFill>
-                  <a:srgbClr val="37261A"/>
+                  <a:srgbClr val="493527"/>
                 </a:solidFill>
               </a:rPr>
               <a:t>확인할 것</a:t>
@@ -8603,14 +9020,14 @@
       </p:sp>
       <p:sp>
         <p:nvSpPr>
-          <p:cNvPr id="7" name="TextBox 6"/>
+          <p:cNvPr id="9" name="TextBox 8"/>
           <p:cNvSpPr txBox="1"/>
           <p:nvPr/>
         </p:nvSpPr>
         <p:spPr>
           <a:xfrm>
-            <a:off x="777240" y="3108960"/>
-            <a:ext cx="3210458" cy="2514600"/>
+            <a:off x="777240" y="3246120"/>
+            <a:ext cx="3210458" cy="2331720"/>
           </a:xfrm>
           <a:prstGeom prst="rect">
             <a:avLst/>
@@ -8631,7 +9048,7 @@
             <a:r>
               <a:rPr sz="1500" b="0" i="0">
                 <a:solidFill>
-                  <a:srgbClr val="2B2B2B"/>
+                  <a:srgbClr val="26231F"/>
                 </a:solidFill>
               </a:rPr>
               <a:t>내용을 입력하세요</a:t>
@@ -8641,27 +9058,25 @@
       </p:sp>
       <p:sp>
         <p:nvSpPr>
-          <p:cNvPr id="8" name="카드 2"/>
+          <p:cNvPr id="10" name="카드 2"/>
           <p:cNvSpPr/>
           <p:nvPr/>
         </p:nvSpPr>
         <p:spPr>
           <a:xfrm>
-            <a:off x="4353458" y="1645920"/>
-            <a:ext cx="3484778" cy="4114800"/>
+            <a:off x="4353458" y="1783080"/>
+            <a:ext cx="3484778" cy="3931920"/>
           </a:xfrm>
           <a:prstGeom prst="roundRect">
             <a:avLst>
-              <a:gd name="adj" fmla="val 8000"/>
+              <a:gd name="adj" fmla="val 7000"/>
             </a:avLst>
           </a:prstGeom>
           <a:solidFill>
-            <a:srgbClr val="F8F4F1"/>
+            <a:srgbClr val="FBF2EC"/>
           </a:solidFill>
-          <a:ln w="15875">
-            <a:solidFill>
-              <a:srgbClr val="EDDED4"/>
-            </a:solidFill>
+          <a:ln>
+            <a:noFill/>
           </a:ln>
         </p:spPr>
         <p:txBody>
@@ -8674,23 +9089,23 @@
       </p:sp>
       <p:sp>
         <p:nvSpPr>
-          <p:cNvPr id="9" name="번호 2"/>
+          <p:cNvPr id="11" name="번호 2"/>
           <p:cNvSpPr/>
           <p:nvPr/>
         </p:nvSpPr>
         <p:spPr>
           <a:xfrm>
-            <a:off x="4536338" y="1828800"/>
+            <a:off x="4536338" y="1965960"/>
             <a:ext cx="457200" cy="457200"/>
           </a:xfrm>
           <a:prstGeom prst="ellipse">
             <a:avLst/>
           </a:prstGeom>
-          <a:solidFill>
-            <a:srgbClr val="765037"/>
-          </a:solidFill>
-          <a:ln>
-            <a:noFill/>
+          <a:noFill/>
+          <a:ln w="19050">
+            <a:solidFill>
+              <a:srgbClr val="D89F79"/>
+            </a:solidFill>
           </a:ln>
         </p:spPr>
         <p:txBody>
@@ -8707,7 +9122,7 @@
             <a:r>
               <a:rPr sz="1600" b="1" i="0">
                 <a:solidFill>
-                  <a:srgbClr val="FFFFFF"/>
+                  <a:srgbClr val="493527"/>
                 </a:solidFill>
               </a:rPr>
               <a:t>2</a:t>
@@ -8717,13 +9132,13 @@
       </p:sp>
       <p:sp>
         <p:nvSpPr>
-          <p:cNvPr id="10" name="TextBox 9"/>
+          <p:cNvPr id="12" name="TextBox 11"/>
           <p:cNvSpPr txBox="1"/>
           <p:nvPr/>
         </p:nvSpPr>
         <p:spPr>
           <a:xfrm>
-            <a:off x="4490618" y="2423160"/>
+            <a:off x="4490618" y="2560320"/>
             <a:ext cx="3210458" cy="640080"/>
           </a:xfrm>
           <a:prstGeom prst="rect">
@@ -8745,7 +9160,7 @@
             <a:r>
               <a:rPr sz="1800" b="1" i="0">
                 <a:solidFill>
-                  <a:srgbClr val="37261A"/>
+                  <a:srgbClr val="493527"/>
                 </a:solidFill>
               </a:rPr>
               <a:t>문의할 것</a:t>
@@ -8755,14 +9170,14 @@
       </p:sp>
       <p:sp>
         <p:nvSpPr>
-          <p:cNvPr id="11" name="TextBox 10"/>
+          <p:cNvPr id="13" name="TextBox 12"/>
           <p:cNvSpPr txBox="1"/>
           <p:nvPr/>
         </p:nvSpPr>
         <p:spPr>
           <a:xfrm>
-            <a:off x="4490618" y="3108960"/>
-            <a:ext cx="3210458" cy="2514600"/>
+            <a:off x="4490618" y="3246120"/>
+            <a:ext cx="3210458" cy="2331720"/>
           </a:xfrm>
           <a:prstGeom prst="rect">
             <a:avLst/>
@@ -8783,7 +9198,7 @@
             <a:r>
               <a:rPr sz="1500" b="0" i="0">
                 <a:solidFill>
-                  <a:srgbClr val="2B2B2B"/>
+                  <a:srgbClr val="26231F"/>
                 </a:solidFill>
               </a:rPr>
               <a:t>내용을 입력하세요</a:t>
@@ -8793,27 +9208,25 @@
       </p:sp>
       <p:sp>
         <p:nvSpPr>
-          <p:cNvPr id="12" name="카드 3"/>
+          <p:cNvPr id="14" name="카드 3"/>
           <p:cNvSpPr/>
           <p:nvPr/>
         </p:nvSpPr>
         <p:spPr>
           <a:xfrm>
-            <a:off x="8066836" y="1645920"/>
-            <a:ext cx="3484778" cy="4114800"/>
+            <a:off x="8066836" y="1783080"/>
+            <a:ext cx="3484778" cy="3931920"/>
           </a:xfrm>
           <a:prstGeom prst="roundRect">
             <a:avLst>
-              <a:gd name="adj" fmla="val 8000"/>
+              <a:gd name="adj" fmla="val 7000"/>
             </a:avLst>
           </a:prstGeom>
           <a:solidFill>
-            <a:srgbClr val="F8F4F1"/>
+            <a:srgbClr val="FBF2EC"/>
           </a:solidFill>
-          <a:ln w="15875">
-            <a:solidFill>
-              <a:srgbClr val="EDDED4"/>
-            </a:solidFill>
+          <a:ln>
+            <a:noFill/>
           </a:ln>
         </p:spPr>
         <p:txBody>
@@ -8826,23 +9239,23 @@
       </p:sp>
       <p:sp>
         <p:nvSpPr>
-          <p:cNvPr id="13" name="번호 3"/>
+          <p:cNvPr id="15" name="번호 3"/>
           <p:cNvSpPr/>
           <p:nvPr/>
         </p:nvSpPr>
         <p:spPr>
           <a:xfrm>
-            <a:off x="8249716" y="1828800"/>
+            <a:off x="8249716" y="1965960"/>
             <a:ext cx="457200" cy="457200"/>
           </a:xfrm>
           <a:prstGeom prst="ellipse">
             <a:avLst/>
           </a:prstGeom>
-          <a:solidFill>
-            <a:srgbClr val="765037"/>
-          </a:solidFill>
-          <a:ln>
-            <a:noFill/>
+          <a:noFill/>
+          <a:ln w="19050">
+            <a:solidFill>
+              <a:srgbClr val="D89F79"/>
+            </a:solidFill>
           </a:ln>
         </p:spPr>
         <p:txBody>
@@ -8859,7 +9272,7 @@
             <a:r>
               <a:rPr sz="1600" b="1" i="0">
                 <a:solidFill>
-                  <a:srgbClr val="FFFFFF"/>
+                  <a:srgbClr val="493527"/>
                 </a:solidFill>
               </a:rPr>
               <a:t>3</a:t>
@@ -8869,13 +9282,13 @@
       </p:sp>
       <p:sp>
         <p:nvSpPr>
-          <p:cNvPr id="14" name="TextBox 13"/>
+          <p:cNvPr id="16" name="TextBox 15"/>
           <p:cNvSpPr txBox="1"/>
           <p:nvPr/>
         </p:nvSpPr>
         <p:spPr>
           <a:xfrm>
-            <a:off x="8203996" y="2423160"/>
+            <a:off x="8203996" y="2560320"/>
             <a:ext cx="3210458" cy="640080"/>
           </a:xfrm>
           <a:prstGeom prst="rect">
@@ -8897,7 +9310,7 @@
             <a:r>
               <a:rPr sz="1800" b="1" i="0">
                 <a:solidFill>
-                  <a:srgbClr val="37261A"/>
+                  <a:srgbClr val="493527"/>
                 </a:solidFill>
               </a:rPr>
               <a:t>정리할 날짜</a:t>
@@ -8907,14 +9320,14 @@
       </p:sp>
       <p:sp>
         <p:nvSpPr>
-          <p:cNvPr id="15" name="TextBox 14"/>
+          <p:cNvPr id="17" name="TextBox 16"/>
           <p:cNvSpPr txBox="1"/>
           <p:nvPr/>
         </p:nvSpPr>
         <p:spPr>
           <a:xfrm>
-            <a:off x="8203996" y="3108960"/>
-            <a:ext cx="3210458" cy="2514600"/>
+            <a:off x="8203996" y="3246120"/>
+            <a:ext cx="3210458" cy="2331720"/>
           </a:xfrm>
           <a:prstGeom prst="rect">
             <a:avLst/>
@@ -8935,7 +9348,7 @@
             <a:r>
               <a:rPr sz="1500" b="0" i="0">
                 <a:solidFill>
-                  <a:srgbClr val="2B2B2B"/>
+                  <a:srgbClr val="26231F"/>
                 </a:solidFill>
               </a:rPr>
               <a:t>내용을 입력하세요</a:t>
@@ -8945,13 +9358,13 @@
       </p:sp>
       <p:sp>
         <p:nvSpPr>
-          <p:cNvPr id="16" name="안내 문구"/>
+          <p:cNvPr id="18" name="안내 문구"/>
           <p:cNvSpPr txBox="1"/>
           <p:nvPr/>
         </p:nvSpPr>
         <p:spPr>
           <a:xfrm>
-            <a:off x="640080" y="5852160"/>
+            <a:off x="640080" y="5806440"/>
             <a:ext cx="10911535" cy="548640"/>
           </a:xfrm>
           <a:prstGeom prst="rect">
@@ -9000,34 +9413,34 @@
         <a:sysClr val="window" lastClr="FFFFFF"/>
       </a:lt1>
       <a:dk2>
-        <a:srgbClr val="37261A"/>
+        <a:srgbClr val="493527"/>
       </a:dk2>
       <a:lt2>
-        <a:srgbClr val="F8F4F1"/>
+        <a:srgbClr val="FBF2EC"/>
       </a:lt2>
       <a:accent1>
-        <a:srgbClr val="765037"/>
+        <a:srgbClr val="D89F79"/>
       </a:accent1>
       <a:accent2>
-        <a:srgbClr val="418B83"/>
+        <a:srgbClr val="E1D798"/>
       </a:accent2>
       <a:accent3>
-        <a:srgbClr val="37261A"/>
+        <a:srgbClr val="493527"/>
       </a:accent3>
       <a:accent4>
-        <a:srgbClr val="EDDED4"/>
+        <a:srgbClr val="F6E2D5"/>
       </a:accent4>
       <a:accent5>
-        <a:srgbClr val="5C6E5D"/>
+        <a:srgbClr val="DCBB88"/>
       </a:accent5>
       <a:accent6>
-        <a:srgbClr val="877D76"/>
+        <a:srgbClr val="92867D"/>
       </a:accent6>
       <a:hlink>
-        <a:srgbClr val="765037"/>
+        <a:srgbClr val="D89F79"/>
       </a:hlink>
       <a:folHlink>
-        <a:srgbClr val="37261A"/>
+        <a:srgbClr val="493527"/>
       </a:folHlink>
     </a:clrScheme>
     <a:fontScheme name="Office">
